--- a/CRM_Final.pptx
+++ b/CRM_Final.pptx
@@ -19,6 +19,7 @@
     <p:sldId id="267" r:id="rId13"/>
     <p:sldId id="268" r:id="rId14"/>
     <p:sldId id="269" r:id="rId15"/>
+    <p:sldId id="274" r:id="rId25"/>
     <p:sldId id="270" r:id="rId16"/>
     <p:sldId id="271" r:id="rId17"/>
     <p:sldId id="272" r:id="rId18"/>
@@ -917,29 +918,27 @@
             </c:spPr>
           </c:dPt>
           <c:cat>
-            <c:multiLvlStrRef>
+            <c:strRef>
               <c:f>Sheet1!$A$2:$A$6</c:f>
-              <c:multiLvlStrCache>
+              <c:strCache>
                 <c:ptCount val="5"/>
-                <c:lvl>
-                  <c:pt idx="0">
-                    <c:v>Dummy prior</c:v>
-                  </c:pt>
-                  <c:pt idx="1">
-                    <c:v>Logistic Regression</c:v>
-                  </c:pt>
-                  <c:pt idx="2">
-                    <c:v>Random Forest</c:v>
-                  </c:pt>
-                  <c:pt idx="3">
-                    <c:v>MLP</c:v>
-                  </c:pt>
-                  <c:pt idx="4">
-                    <c:v>TabNet</c:v>
-                  </c:pt>
-                </c:lvl>
-              </c:multiLvlStrCache>
-            </c:multiLvlStrRef>
+                <c:pt idx="0">
+                  <c:v>Dummy prior</c:v>
+                </c:pt>
+                <c:pt idx="1">
+                  <c:v>Logistic Regression</c:v>
+                </c:pt>
+                <c:pt idx="2">
+                  <c:v>Random Forest</c:v>
+                </c:pt>
+                <c:pt idx="3">
+                  <c:v>MLP</c:v>
+                </c:pt>
+                <c:pt idx="4">
+                  <c:v>TabNet</c:v>
+                </c:pt>
+              </c:strCache>
+            </c:strRef>
           </c:cat>
           <c:val>
             <c:numRef>
@@ -951,16 +950,16 @@
                   <c:v>0.5</c:v>
                 </c:pt>
                 <c:pt idx="1">
-                  <c:v>0.5238036845705235</c:v>
+                  <c:v>0.5238059345525236</c:v>
                 </c:pt>
                 <c:pt idx="2">
-                  <c:v>0.5194465944272445</c:v>
+                  <c:v>0.5180167308661531</c:v>
                 </c:pt>
                 <c:pt idx="3">
-                  <c:v>0.4954460364317085</c:v>
+                  <c:v>0.4954471614227086</c:v>
                 </c:pt>
                 <c:pt idx="4">
-                  <c:v>0.5173304863561092</c:v>
+                  <c:v>0.5068309453524372</c:v>
                 </c:pt>
               </c:numCache>
             </c:numRef>
@@ -3113,7 +3112,7 @@
           <a:p>
             <a:r>
               <a:rPr lang="en-US" dirty="0"/>
-              <a:t>Our contribution is not a new algorithm. It is a careful workflow that combines prediction with explanation, a leakage audit, a label-availability split, input warnings and a known-truth simulation, all reproducible on a CPU with one command.</a:t>
+              <a:t>Our contribution is not a new algorithm. It is a careful workflow where each part has evidence. The explanations move the score three times more than random factors. The leaky control shows how a fake perfect score happens. A random split changes AUC by at most 0.04, so our split is a safeguard, not a trick. Missing accounts are flagged. And the simulation shows the pipeline learns when signal exists. Everything runs on a CPU with one command.</a:t>
             </a:r>
             <a:endParaRPr lang="en-US" dirty="0"/>
           </a:p>
@@ -3331,6 +3330,76 @@
 </p:notes>
 </file>
 
+<file path=ppt/notesSlides/notesSlide19.xml><?xml version="1.0" encoding="utf-8"?>
+<p:notes xmlns:a="http://schemas.openxmlformats.org/drawingml/2006/main" xmlns:p="http://schemas.openxmlformats.org/presentationml/2006/main" xmlns:r="http://schemas.openxmlformats.org/officeDocument/2006/relationships">
+  <p:cSld>
+    <p:spTree>
+      <p:nvGrpSpPr>
+        <p:cNvPr id="1" name=""/>
+        <p:cNvGrpSpPr/>
+        <p:nvPr/>
+      </p:nvGrpSpPr>
+      <p:grpSpPr>
+        <a:xfrm>
+          <a:off x="0" y="0"/>
+          <a:ext cx="0" cy="0"/>
+          <a:chOff x="0" y="0"/>
+          <a:chExt cx="0" cy="0"/>
+        </a:xfrm>
+      </p:grpSpPr>
+      <p:sp>
+        <p:nvSpPr>
+          <p:cNvPr id="2" name="Slide Image Placeholder 1"/>
+          <p:cNvSpPr>
+            <a:spLocks noGrp="1"/>
+          </p:cNvSpPr>
+          <p:nvPr>
+            <p:ph type="sldImg" idx="2"/>
+          </p:nvPr>
+        </p:nvSpPr>
+        <p:spPr/>
+      </p:sp>
+      <p:sp>
+        <p:nvSpPr>
+          <p:cNvPr id="3" name="Notes Placeholder 2"/>
+          <p:cNvSpPr>
+            <a:spLocks noGrp="1"/>
+          </p:cNvSpPr>
+          <p:nvPr>
+            <p:ph type="body" idx="3" sz="quarter"/>
+          </p:nvPr>
+        </p:nvSpPr>
+        <p:spPr/>
+        <p:txBody>
+          <a:bodyPr/>
+          <a:lstStyle/>
+          <a:p>
+            <a:r>
+              <a:t>Both MLP and TabNet are neural networks, so this is the fairest deep-learning comparison. On the real data TabNet scores 0.507 and the MLP 0.495. But the 95 percent confidence interval for the difference goes from minus 0.030 to plus 0.054, so it is not a real win. On simulated data they are within 0.002 AUC: TabNet is ahead in four of five seeds with interactions, and three of five with smooth signals. TabNet is about 27 times slower to train here, and 35 times slower on 100,000 deals. What TabNet does give us is built-in attention, which shows the features each decision step used. The MLP needs a separate method for that.</a:t>
+            </a:r>
+          </a:p>
+        </p:txBody>
+      </p:sp>
+      <p:sp>
+        <p:nvSpPr>
+          <p:cNvPr id="4" name="Slide Number Placeholder 3"/>
+          <p:cNvSpPr>
+            <a:spLocks noGrp="1"/>
+          </p:cNvSpPr>
+          <p:nvPr>
+            <p:ph type="sldNum" idx="5" sz="quarter"/>
+          </p:nvPr>
+        </p:nvSpPr>
+        <p:spPr/>
+      </p:sp>
+    </p:spTree>
+  </p:cSld>
+  <p:clrMapOvr>
+    <a:masterClrMapping/>
+  </p:clrMapOvr>
+</p:notes>
+</file>
+
 <file path=ppt/notesSlides/notesSlide2.xml><?xml version="1.0" encoding="utf-8"?>
 <p:notes xmlns:a="http://schemas.openxmlformats.org/drawingml/2006/main" xmlns:r="http://schemas.openxmlformats.org/officeDocument/2006/relationships" xmlns:p="http://schemas.openxmlformats.org/presentationml/2006/main">
   <p:cSld>
@@ -3641,7 +3710,7 @@
           <a:p>
             <a:r>
               <a:rPr lang="en-US" dirty="0"/>
-              <a:t>We split by time, not at random. Train has 2,975 deals, validation 583 and test 1,361. Deals from the same date stay together. We purged 1,792 rows whose outcomes were not known at the cutoff, so the model never learns from the future. Preprocessing is fit on the training set only.</a:t>
+              <a:t>We split by time, not at random. Train has 2,975 deals, validation 583 and test 1,361. Deals from the same date stay together. We purged 1,792 rows whose outcomes were not known at the cutoff, so the model never learns from the future. Preprocessing is fit on the training set only. We also checked whether this matters: a random split gives at most 0.04 higher AUC, and every protocol is still near chance. So the split is a safeguard, not the reason our scores are low.</a:t>
             </a:r>
             <a:endParaRPr lang="en-US" dirty="0"/>
           </a:p>
@@ -3993,7 +4062,7 @@
           <a:p>
             <a:r>
               <a:rPr lang="en-US" dirty="0"/>
-              <a:t>Permutation importance shows how much test ROC-AUC drops when we shuffle one feature. sales_agent matters most, but every drop is small, which matches the weak overall result. For each open deal we also report positive and negative factors: we replace one input with its training median or mode and measure the change in win probability. Random Forest SHAP is a separate diagnostic; its additivity check passes. These are sensitivities of the model's score, not causes.</a:t>
+              <a:t>Permutation importance shows how much test ROC-AUC drops when we shuffle one feature. sales_agent matters most, but every drop is small, which matches the weak overall result. For each open deal we also report positive and negative factors: we replace one input with its training median or mode and measure the change in win probability. We also checked that these factors describe the model. On the Random Forest they agree with TreeSHAP, with a median Spearman correlation of 0.76. And if we reset a deal's top three factors, the score moves 3.1 times more than if we reset three random factors. These are sensitivities of the model's score, not causes.</a:t>
             </a:r>
             <a:endParaRPr lang="en-US" dirty="0"/>
           </a:p>
@@ -7557,6 +7626,1814 @@
 
 <file path=ppt/slides/slide15.xml><?xml version="1.0" encoding="utf-8"?>
 <p:sld xmlns:a="http://schemas.openxmlformats.org/drawingml/2006/main" xmlns:r="http://schemas.openxmlformats.org/officeDocument/2006/relationships" xmlns:p="http://schemas.openxmlformats.org/presentationml/2006/main">
+  <p:cSld name="Slide 8">
+    <p:spTree>
+      <p:nvGrpSpPr>
+        <p:cNvPr id="1" name=""/>
+        <p:cNvGrpSpPr/>
+        <p:nvPr/>
+      </p:nvGrpSpPr>
+      <p:grpSpPr>
+        <a:xfrm>
+          <a:off x="0" y="0"/>
+          <a:ext cx="0" cy="0"/>
+          <a:chOff x="0" y="0"/>
+          <a:chExt cx="0" cy="0"/>
+        </a:xfrm>
+      </p:grpSpPr>
+      <p:sp>
+        <p:nvSpPr>
+          <p:cNvPr id="2" name="Text 0"/>
+          <p:cNvSpPr/>
+          <p:nvPr>
+            <p:ph idx="100" type="title" hasCustomPrompt="1"/>
+          </p:nvPr>
+        </p:nvSpPr>
+        <p:spPr>
+          <a:xfrm>
+            <a:off x="548640" y="365760"/>
+            <a:ext cx="11094415" cy="822960"/>
+          </a:xfrm>
+          <a:prstGeom prst="rect">
+            <a:avLst/>
+          </a:prstGeom>
+          <a:noFill/>
+          <a:ln/>
+        </p:spPr>
+        <p:txBody>
+          <a:bodyPr wrap="square" lIns="0" tIns="0" rIns="0" bIns="0" rtlCol="0" anchor="ctr"/>
+          <a:lstStyle/>
+          <a:p>
+            <a:pPr algn="l" indent="0" marL="0">
+              <a:buNone/>
+            </a:pPr>
+            <a:r>
+              <a:rPr lang="en-US" sz="3400" b="1" dirty="0">
+                <a:solidFill>
+                  <a:schemeClr val="tx2"/>
+                </a:solidFill>
+                <a:latin typeface="Cambria" pitchFamily="34" charset="0"/>
+                <a:ea typeface="Cambria" pitchFamily="34" charset="-122"/>
+                <a:cs typeface="Cambria" pitchFamily="34" charset="-120"/>
+              </a:rPr>
+              <a:t>TabNet vs MLP: no clear accuracy winner</a:t>
+            </a:r>
+            <a:endParaRPr lang="en-US" sz="3400" dirty="0"/>
+          </a:p>
+        </p:txBody>
+      </p:sp>
+      <p:graphicFrame>
+        <p:nvGraphicFramePr>
+          <p:cNvPr id="9" name="metrics-table"/>
+          <p:cNvGraphicFramePr>
+            <a:graphicFrameLocks noGrp="1"/>
+          </p:cNvGraphicFramePr>
+          <p:nvPr>
+            <p:extLst>
+              <p:ext uri="{D42A27DB-BD31-4B8C-83A1-F6EECF244321}">
+                <p14:modId xmlns:p14="http://schemas.microsoft.com/office/powerpoint/2010/main" val="1579011935"/>
+              </p:ext>
+            </p:extLst>
+          </p:nvPr>
+        </p:nvGraphicFramePr>
+        <p:xfrm>
+          <a:off x="548640" y="1371600"/>
+          <a:ext cx="6949440" cy="3291840"/>
+        </p:xfrm>
+        <a:graphic>
+          <a:graphicData uri="http://schemas.openxmlformats.org/drawingml/2006/table">
+            <a:tbl>
+              <a:tblPr/>
+              <a:tblGrid>
+                <a:gridCol w="3200400"/>
+                <a:gridCol w="1874519"/>
+                <a:gridCol w="1874519"/>
+              </a:tblGrid>
+              <a:tr h="411480">
+                <a:tc>
+                  <a:txBody>
+                    <a:bodyPr/>
+                    <a:lstStyle/>
+                    <a:p>
+                      <a:pPr algn="l" indent="0" marL="0">
+                        <a:buNone/>
+                      </a:pPr>
+                      <a:r>
+                        <a:rPr lang="en-US" sz="1400" b="1" dirty="0">
+                          <a:solidFill>
+                            <a:schemeClr val="bg1"/>
+                          </a:solidFill>
+                        </a:rPr>
+                        <a:t>Comparison</a:t>
+                      </a:r>
+                      <a:endParaRPr lang="en-US" sz="1400" dirty="0"/>
+                    </a:p>
+                  </a:txBody>
+                  <a:tcPr marL="91440" marR="91440" marT="45720" marB="45720" anchor="ctr">
+                    <a:lnL w="6350" cap="flat" cmpd="sng" algn="ctr">
+                      <a:solidFill>
+                        <a:srgbClr val="DCE5E3"/>
+                      </a:solidFill>
+                      <a:prstDash val="solid"/>
+                      <a:round/>
+                      <a:headEnd type="none" w="med" len="med"/>
+                      <a:tailEnd type="none" w="med" len="med"/>
+                    </a:lnL>
+                    <a:lnR w="6350" cap="flat" cmpd="sng" algn="ctr">
+                      <a:solidFill>
+                        <a:srgbClr val="DCE5E3"/>
+                      </a:solidFill>
+                      <a:prstDash val="solid"/>
+                      <a:round/>
+                      <a:headEnd type="none" w="med" len="med"/>
+                      <a:tailEnd type="none" w="med" len="med"/>
+                    </a:lnR>
+                    <a:lnT w="6350" cap="flat" cmpd="sng" algn="ctr">
+                      <a:solidFill>
+                        <a:srgbClr val="DCE5E3"/>
+                      </a:solidFill>
+                      <a:prstDash val="solid"/>
+                      <a:round/>
+                      <a:headEnd type="none" w="med" len="med"/>
+                      <a:tailEnd type="none" w="med" len="med"/>
+                    </a:lnT>
+                    <a:lnB w="6350" cap="flat" cmpd="sng" algn="ctr">
+                      <a:solidFill>
+                        <a:srgbClr val="DCE5E3"/>
+                      </a:solidFill>
+                      <a:prstDash val="solid"/>
+                      <a:round/>
+                      <a:headEnd type="none" w="med" len="med"/>
+                      <a:tailEnd type="none" w="med" len="med"/>
+                    </a:lnB>
+                    <a:solidFill>
+                      <a:schemeClr val="tx2"/>
+                    </a:solidFill>
+                  </a:tcPr>
+                </a:tc>
+                <a:tc>
+                  <a:txBody>
+                    <a:bodyPr/>
+                    <a:lstStyle/>
+                    <a:p>
+                      <a:pPr algn="r" indent="0" marL="0">
+                        <a:buNone/>
+                      </a:pPr>
+                      <a:r>
+                        <a:rPr lang="en-US" sz="1400" b="1" dirty="0">
+                          <a:solidFill>
+                            <a:schemeClr val="bg1"/>
+                          </a:solidFill>
+                        </a:rPr>
+                        <a:t>MLP</a:t>
+                      </a:r>
+                      <a:endParaRPr lang="en-US" sz="1400" dirty="0"/>
+                    </a:p>
+                  </a:txBody>
+                  <a:tcPr marL="91440" marR="91440" marT="45720" marB="45720" anchor="ctr">
+                    <a:lnL w="6350" cap="flat" cmpd="sng" algn="ctr">
+                      <a:solidFill>
+                        <a:srgbClr val="DCE5E3"/>
+                      </a:solidFill>
+                      <a:prstDash val="solid"/>
+                      <a:round/>
+                      <a:headEnd type="none" w="med" len="med"/>
+                      <a:tailEnd type="none" w="med" len="med"/>
+                    </a:lnL>
+                    <a:lnR w="6350" cap="flat" cmpd="sng" algn="ctr">
+                      <a:solidFill>
+                        <a:srgbClr val="DCE5E3"/>
+                      </a:solidFill>
+                      <a:prstDash val="solid"/>
+                      <a:round/>
+                      <a:headEnd type="none" w="med" len="med"/>
+                      <a:tailEnd type="none" w="med" len="med"/>
+                    </a:lnR>
+                    <a:lnT w="6350" cap="flat" cmpd="sng" algn="ctr">
+                      <a:solidFill>
+                        <a:srgbClr val="DCE5E3"/>
+                      </a:solidFill>
+                      <a:prstDash val="solid"/>
+                      <a:round/>
+                      <a:headEnd type="none" w="med" len="med"/>
+                      <a:tailEnd type="none" w="med" len="med"/>
+                    </a:lnT>
+                    <a:lnB w="6350" cap="flat" cmpd="sng" algn="ctr">
+                      <a:solidFill>
+                        <a:srgbClr val="DCE5E3"/>
+                      </a:solidFill>
+                      <a:prstDash val="solid"/>
+                      <a:round/>
+                      <a:headEnd type="none" w="med" len="med"/>
+                      <a:tailEnd type="none" w="med" len="med"/>
+                    </a:lnB>
+                    <a:solidFill>
+                      <a:schemeClr val="tx2"/>
+                    </a:solidFill>
+                  </a:tcPr>
+                </a:tc>
+                <a:tc>
+                  <a:txBody>
+                    <a:bodyPr/>
+                    <a:lstStyle/>
+                    <a:p>
+                      <a:pPr algn="r" indent="0" marL="0">
+                        <a:buNone/>
+                      </a:pPr>
+                      <a:r>
+                        <a:rPr lang="en-US" sz="1400" b="1" dirty="0">
+                          <a:solidFill>
+                            <a:schemeClr val="bg1"/>
+                          </a:solidFill>
+                        </a:rPr>
+                        <a:t>TabNet</a:t>
+                      </a:r>
+                      <a:endParaRPr lang="en-US" sz="1400" dirty="0"/>
+                    </a:p>
+                  </a:txBody>
+                  <a:tcPr marL="91440" marR="91440" marT="45720" marB="45720" anchor="ctr">
+                    <a:lnL w="6350" cap="flat" cmpd="sng" algn="ctr">
+                      <a:solidFill>
+                        <a:srgbClr val="DCE5E3"/>
+                      </a:solidFill>
+                      <a:prstDash val="solid"/>
+                      <a:round/>
+                      <a:headEnd type="none" w="med" len="med"/>
+                      <a:tailEnd type="none" w="med" len="med"/>
+                    </a:lnL>
+                    <a:lnR w="6350" cap="flat" cmpd="sng" algn="ctr">
+                      <a:solidFill>
+                        <a:srgbClr val="DCE5E3"/>
+                      </a:solidFill>
+                      <a:prstDash val="solid"/>
+                      <a:round/>
+                      <a:headEnd type="none" w="med" len="med"/>
+                      <a:tailEnd type="none" w="med" len="med"/>
+                    </a:lnR>
+                    <a:lnT w="6350" cap="flat" cmpd="sng" algn="ctr">
+                      <a:solidFill>
+                        <a:srgbClr val="DCE5E3"/>
+                      </a:solidFill>
+                      <a:prstDash val="solid"/>
+                      <a:round/>
+                      <a:headEnd type="none" w="med" len="med"/>
+                      <a:tailEnd type="none" w="med" len="med"/>
+                    </a:lnT>
+                    <a:lnB w="6350" cap="flat" cmpd="sng" algn="ctr">
+                      <a:solidFill>
+                        <a:srgbClr val="DCE5E3"/>
+                      </a:solidFill>
+                      <a:prstDash val="solid"/>
+                      <a:round/>
+                      <a:headEnd type="none" w="med" len="med"/>
+                      <a:tailEnd type="none" w="med" len="med"/>
+                    </a:lnB>
+                    <a:solidFill>
+                      <a:schemeClr val="tx2"/>
+                    </a:solidFill>
+                  </a:tcPr>
+                </a:tc>
+              </a:tr>
+              <a:tr h="411480">
+                <a:tc>
+                  <a:txBody>
+                    <a:bodyPr/>
+                    <a:lstStyle/>
+                    <a:p>
+                      <a:pPr algn="l" indent="0" marL="0">
+                        <a:buNone/>
+                      </a:pPr>
+                      <a:r>
+                        <a:rPr lang="en-US" sz="1400" dirty="0">
+                          <a:solidFill>
+                            <a:schemeClr val="tx1"/>
+                          </a:solidFill>
+                        </a:rPr>
+                        <a:t>Real data: test ROC-AUC</a:t>
+                      </a:r>
+                      <a:endParaRPr lang="en-US" sz="1400" dirty="0"/>
+                    </a:p>
+                  </a:txBody>
+                  <a:tcPr marL="91440" marR="91440" marT="45720" marB="45720" anchor="ctr">
+                    <a:lnL w="6350" cap="flat" cmpd="sng" algn="ctr">
+                      <a:solidFill>
+                        <a:srgbClr val="DCE5E3"/>
+                      </a:solidFill>
+                      <a:prstDash val="solid"/>
+                      <a:round/>
+                      <a:headEnd type="none" w="med" len="med"/>
+                      <a:tailEnd type="none" w="med" len="med"/>
+                    </a:lnL>
+                    <a:lnR w="6350" cap="flat" cmpd="sng" algn="ctr">
+                      <a:solidFill>
+                        <a:srgbClr val="DCE5E3"/>
+                      </a:solidFill>
+                      <a:prstDash val="solid"/>
+                      <a:round/>
+                      <a:headEnd type="none" w="med" len="med"/>
+                      <a:tailEnd type="none" w="med" len="med"/>
+                    </a:lnR>
+                    <a:lnT w="6350" cap="flat" cmpd="sng" algn="ctr">
+                      <a:solidFill>
+                        <a:srgbClr val="DCE5E3"/>
+                      </a:solidFill>
+                      <a:prstDash val="solid"/>
+                      <a:round/>
+                      <a:headEnd type="none" w="med" len="med"/>
+                      <a:tailEnd type="none" w="med" len="med"/>
+                    </a:lnT>
+                    <a:lnB w="6350" cap="flat" cmpd="sng" algn="ctr">
+                      <a:solidFill>
+                        <a:srgbClr val="DCE5E3"/>
+                      </a:solidFill>
+                      <a:prstDash val="solid"/>
+                      <a:round/>
+                      <a:headEnd type="none" w="med" len="med"/>
+                      <a:tailEnd type="none" w="med" len="med"/>
+                    </a:lnB>
+                    <a:solidFill>
+                      <a:schemeClr val="bg1"/>
+                    </a:solidFill>
+                  </a:tcPr>
+                </a:tc>
+                <a:tc>
+                  <a:txBody>
+                    <a:bodyPr/>
+                    <a:lstStyle/>
+                    <a:p>
+                      <a:pPr algn="r" indent="0" marL="0">
+                        <a:buNone/>
+                      </a:pPr>
+                      <a:r>
+                        <a:rPr lang="en-US" sz="1400" dirty="0">
+                          <a:solidFill>
+                            <a:schemeClr val="tx1"/>
+                          </a:solidFill>
+                        </a:rPr>
+                        <a:t>0.495</a:t>
+                      </a:r>
+                      <a:endParaRPr lang="en-US" sz="1400" dirty="0"/>
+                    </a:p>
+                  </a:txBody>
+                  <a:tcPr marL="91440" marR="91440" marT="45720" marB="45720" anchor="ctr">
+                    <a:lnL w="6350" cap="flat" cmpd="sng" algn="ctr">
+                      <a:solidFill>
+                        <a:srgbClr val="DCE5E3"/>
+                      </a:solidFill>
+                      <a:prstDash val="solid"/>
+                      <a:round/>
+                      <a:headEnd type="none" w="med" len="med"/>
+                      <a:tailEnd type="none" w="med" len="med"/>
+                    </a:lnL>
+                    <a:lnR w="6350" cap="flat" cmpd="sng" algn="ctr">
+                      <a:solidFill>
+                        <a:srgbClr val="DCE5E3"/>
+                      </a:solidFill>
+                      <a:prstDash val="solid"/>
+                      <a:round/>
+                      <a:headEnd type="none" w="med" len="med"/>
+                      <a:tailEnd type="none" w="med" len="med"/>
+                    </a:lnR>
+                    <a:lnT w="6350" cap="flat" cmpd="sng" algn="ctr">
+                      <a:solidFill>
+                        <a:srgbClr val="DCE5E3"/>
+                      </a:solidFill>
+                      <a:prstDash val="solid"/>
+                      <a:round/>
+                      <a:headEnd type="none" w="med" len="med"/>
+                      <a:tailEnd type="none" w="med" len="med"/>
+                    </a:lnT>
+                    <a:lnB w="6350" cap="flat" cmpd="sng" algn="ctr">
+                      <a:solidFill>
+                        <a:srgbClr val="DCE5E3"/>
+                      </a:solidFill>
+                      <a:prstDash val="solid"/>
+                      <a:round/>
+                      <a:headEnd type="none" w="med" len="med"/>
+                      <a:tailEnd type="none" w="med" len="med"/>
+                    </a:lnB>
+                    <a:solidFill>
+                      <a:schemeClr val="bg1"/>
+                    </a:solidFill>
+                  </a:tcPr>
+                </a:tc>
+                <a:tc>
+                  <a:txBody>
+                    <a:bodyPr/>
+                    <a:lstStyle/>
+                    <a:p>
+                      <a:pPr algn="r" indent="0" marL="0">
+                        <a:buNone/>
+                      </a:pPr>
+                      <a:r>
+                        <a:rPr lang="en-US" sz="1400" dirty="0">
+                          <a:solidFill>
+                            <a:schemeClr val="tx1"/>
+                          </a:solidFill>
+                        </a:rPr>
+                        <a:t>0.507</a:t>
+                      </a:r>
+                      <a:endParaRPr lang="en-US" sz="1400" dirty="0"/>
+                    </a:p>
+                  </a:txBody>
+                  <a:tcPr marL="91440" marR="91440" marT="45720" marB="45720" anchor="ctr">
+                    <a:lnL w="6350" cap="flat" cmpd="sng" algn="ctr">
+                      <a:solidFill>
+                        <a:srgbClr val="DCE5E3"/>
+                      </a:solidFill>
+                      <a:prstDash val="solid"/>
+                      <a:round/>
+                      <a:headEnd type="none" w="med" len="med"/>
+                      <a:tailEnd type="none" w="med" len="med"/>
+                    </a:lnL>
+                    <a:lnR w="6350" cap="flat" cmpd="sng" algn="ctr">
+                      <a:solidFill>
+                        <a:srgbClr val="DCE5E3"/>
+                      </a:solidFill>
+                      <a:prstDash val="solid"/>
+                      <a:round/>
+                      <a:headEnd type="none" w="med" len="med"/>
+                      <a:tailEnd type="none" w="med" len="med"/>
+                    </a:lnR>
+                    <a:lnT w="6350" cap="flat" cmpd="sng" algn="ctr">
+                      <a:solidFill>
+                        <a:srgbClr val="DCE5E3"/>
+                      </a:solidFill>
+                      <a:prstDash val="solid"/>
+                      <a:round/>
+                      <a:headEnd type="none" w="med" len="med"/>
+                      <a:tailEnd type="none" w="med" len="med"/>
+                    </a:lnT>
+                    <a:lnB w="6350" cap="flat" cmpd="sng" algn="ctr">
+                      <a:solidFill>
+                        <a:srgbClr val="DCE5E3"/>
+                      </a:solidFill>
+                      <a:prstDash val="solid"/>
+                      <a:round/>
+                      <a:headEnd type="none" w="med" len="med"/>
+                      <a:tailEnd type="none" w="med" len="med"/>
+                    </a:lnB>
+                    <a:solidFill>
+                      <a:schemeClr val="bg1"/>
+                    </a:solidFill>
+                  </a:tcPr>
+                </a:tc>
+              </a:tr>
+              <a:tr h="411480">
+                <a:tc>
+                  <a:txBody>
+                    <a:bodyPr/>
+                    <a:lstStyle/>
+                    <a:p>
+                      <a:pPr algn="l" indent="0" marL="0">
+                        <a:buNone/>
+                      </a:pPr>
+                      <a:r>
+                        <a:rPr lang="en-US" sz="1400" dirty="0">
+                          <a:solidFill>
+                            <a:schemeClr val="tx1"/>
+                          </a:solidFill>
+                        </a:rPr>
+                        <a:t>Real data: validation ROC-AUC</a:t>
+                      </a:r>
+                      <a:endParaRPr lang="en-US" sz="1400" dirty="0"/>
+                    </a:p>
+                  </a:txBody>
+                  <a:tcPr marL="91440" marR="91440" marT="45720" marB="45720" anchor="ctr">
+                    <a:lnL w="6350" cap="flat" cmpd="sng" algn="ctr">
+                      <a:solidFill>
+                        <a:srgbClr val="DCE5E3"/>
+                      </a:solidFill>
+                      <a:prstDash val="solid"/>
+                      <a:round/>
+                      <a:headEnd type="none" w="med" len="med"/>
+                      <a:tailEnd type="none" w="med" len="med"/>
+                    </a:lnL>
+                    <a:lnR w="6350" cap="flat" cmpd="sng" algn="ctr">
+                      <a:solidFill>
+                        <a:srgbClr val="DCE5E3"/>
+                      </a:solidFill>
+                      <a:prstDash val="solid"/>
+                      <a:round/>
+                      <a:headEnd type="none" w="med" len="med"/>
+                      <a:tailEnd type="none" w="med" len="med"/>
+                    </a:lnR>
+                    <a:lnT w="6350" cap="flat" cmpd="sng" algn="ctr">
+                      <a:solidFill>
+                        <a:srgbClr val="DCE5E3"/>
+                      </a:solidFill>
+                      <a:prstDash val="solid"/>
+                      <a:round/>
+                      <a:headEnd type="none" w="med" len="med"/>
+                      <a:tailEnd type="none" w="med" len="med"/>
+                    </a:lnT>
+                    <a:lnB w="6350" cap="flat" cmpd="sng" algn="ctr">
+                      <a:solidFill>
+                        <a:srgbClr val="DCE5E3"/>
+                      </a:solidFill>
+                      <a:prstDash val="solid"/>
+                      <a:round/>
+                      <a:headEnd type="none" w="med" len="med"/>
+                      <a:tailEnd type="none" w="med" len="med"/>
+                    </a:lnB>
+                    <a:solidFill>
+                      <a:schemeClr val="bg1"/>
+                    </a:solidFill>
+                  </a:tcPr>
+                </a:tc>
+                <a:tc>
+                  <a:txBody>
+                    <a:bodyPr/>
+                    <a:lstStyle/>
+                    <a:p>
+                      <a:pPr algn="r" indent="0" marL="0">
+                        <a:buNone/>
+                      </a:pPr>
+                      <a:r>
+                        <a:rPr lang="en-US" sz="1400" dirty="0">
+                          <a:solidFill>
+                            <a:schemeClr val="tx1"/>
+                          </a:solidFill>
+                        </a:rPr>
+                        <a:t>0.529</a:t>
+                      </a:r>
+                      <a:endParaRPr lang="en-US" sz="1400" dirty="0"/>
+                    </a:p>
+                  </a:txBody>
+                  <a:tcPr marL="91440" marR="91440" marT="45720" marB="45720" anchor="ctr">
+                    <a:lnL w="6350" cap="flat" cmpd="sng" algn="ctr">
+                      <a:solidFill>
+                        <a:srgbClr val="DCE5E3"/>
+                      </a:solidFill>
+                      <a:prstDash val="solid"/>
+                      <a:round/>
+                      <a:headEnd type="none" w="med" len="med"/>
+                      <a:tailEnd type="none" w="med" len="med"/>
+                    </a:lnL>
+                    <a:lnR w="6350" cap="flat" cmpd="sng" algn="ctr">
+                      <a:solidFill>
+                        <a:srgbClr val="DCE5E3"/>
+                      </a:solidFill>
+                      <a:prstDash val="solid"/>
+                      <a:round/>
+                      <a:headEnd type="none" w="med" len="med"/>
+                      <a:tailEnd type="none" w="med" len="med"/>
+                    </a:lnR>
+                    <a:lnT w="6350" cap="flat" cmpd="sng" algn="ctr">
+                      <a:solidFill>
+                        <a:srgbClr val="DCE5E3"/>
+                      </a:solidFill>
+                      <a:prstDash val="solid"/>
+                      <a:round/>
+                      <a:headEnd type="none" w="med" len="med"/>
+                      <a:tailEnd type="none" w="med" len="med"/>
+                    </a:lnT>
+                    <a:lnB w="6350" cap="flat" cmpd="sng" algn="ctr">
+                      <a:solidFill>
+                        <a:srgbClr val="DCE5E3"/>
+                      </a:solidFill>
+                      <a:prstDash val="solid"/>
+                      <a:round/>
+                      <a:headEnd type="none" w="med" len="med"/>
+                      <a:tailEnd type="none" w="med" len="med"/>
+                    </a:lnB>
+                    <a:solidFill>
+                      <a:schemeClr val="bg1"/>
+                    </a:solidFill>
+                  </a:tcPr>
+                </a:tc>
+                <a:tc>
+                  <a:txBody>
+                    <a:bodyPr/>
+                    <a:lstStyle/>
+                    <a:p>
+                      <a:pPr algn="r" indent="0" marL="0">
+                        <a:buNone/>
+                      </a:pPr>
+                      <a:r>
+                        <a:rPr lang="en-US" sz="1400" dirty="0">
+                          <a:solidFill>
+                            <a:schemeClr val="tx1"/>
+                          </a:solidFill>
+                        </a:rPr>
+                        <a:t>0.515</a:t>
+                      </a:r>
+                      <a:endParaRPr lang="en-US" sz="1400" dirty="0"/>
+                    </a:p>
+                  </a:txBody>
+                  <a:tcPr marL="91440" marR="91440" marT="45720" marB="45720" anchor="ctr">
+                    <a:lnL w="6350" cap="flat" cmpd="sng" algn="ctr">
+                      <a:solidFill>
+                        <a:srgbClr val="DCE5E3"/>
+                      </a:solidFill>
+                      <a:prstDash val="solid"/>
+                      <a:round/>
+                      <a:headEnd type="none" w="med" len="med"/>
+                      <a:tailEnd type="none" w="med" len="med"/>
+                    </a:lnL>
+                    <a:lnR w="6350" cap="flat" cmpd="sng" algn="ctr">
+                      <a:solidFill>
+                        <a:srgbClr val="DCE5E3"/>
+                      </a:solidFill>
+                      <a:prstDash val="solid"/>
+                      <a:round/>
+                      <a:headEnd type="none" w="med" len="med"/>
+                      <a:tailEnd type="none" w="med" len="med"/>
+                    </a:lnR>
+                    <a:lnT w="6350" cap="flat" cmpd="sng" algn="ctr">
+                      <a:solidFill>
+                        <a:srgbClr val="DCE5E3"/>
+                      </a:solidFill>
+                      <a:prstDash val="solid"/>
+                      <a:round/>
+                      <a:headEnd type="none" w="med" len="med"/>
+                      <a:tailEnd type="none" w="med" len="med"/>
+                    </a:lnT>
+                    <a:lnB w="6350" cap="flat" cmpd="sng" algn="ctr">
+                      <a:solidFill>
+                        <a:srgbClr val="DCE5E3"/>
+                      </a:solidFill>
+                      <a:prstDash val="solid"/>
+                      <a:round/>
+                      <a:headEnd type="none" w="med" len="med"/>
+                      <a:tailEnd type="none" w="med" len="med"/>
+                    </a:lnB>
+                    <a:solidFill>
+                      <a:schemeClr val="bg1"/>
+                    </a:solidFill>
+                  </a:tcPr>
+                </a:tc>
+              </a:tr>
+              <a:tr h="411480">
+                <a:tc>
+                  <a:txBody>
+                    <a:bodyPr/>
+                    <a:lstStyle/>
+                    <a:p>
+                      <a:pPr algn="l" indent="0" marL="0">
+                        <a:buNone/>
+                      </a:pPr>
+                      <a:r>
+                        <a:rPr lang="en-US" sz="1400" dirty="0">
+                          <a:solidFill>
+                            <a:schemeClr val="tx1"/>
+                          </a:solidFill>
+                        </a:rPr>
+                        <a:t>Simulated, interactions (5 seeds)</a:t>
+                      </a:r>
+                      <a:endParaRPr lang="en-US" sz="1400" dirty="0"/>
+                    </a:p>
+                  </a:txBody>
+                  <a:tcPr marL="91440" marR="91440" marT="45720" marB="45720" anchor="ctr">
+                    <a:lnL w="6350" cap="flat" cmpd="sng" algn="ctr">
+                      <a:solidFill>
+                        <a:srgbClr val="DCE5E3"/>
+                      </a:solidFill>
+                      <a:prstDash val="solid"/>
+                      <a:round/>
+                      <a:headEnd type="none" w="med" len="med"/>
+                      <a:tailEnd type="none" w="med" len="med"/>
+                    </a:lnL>
+                    <a:lnR w="6350" cap="flat" cmpd="sng" algn="ctr">
+                      <a:solidFill>
+                        <a:srgbClr val="DCE5E3"/>
+                      </a:solidFill>
+                      <a:prstDash val="solid"/>
+                      <a:round/>
+                      <a:headEnd type="none" w="med" len="med"/>
+                      <a:tailEnd type="none" w="med" len="med"/>
+                    </a:lnR>
+                    <a:lnT w="6350" cap="flat" cmpd="sng" algn="ctr">
+                      <a:solidFill>
+                        <a:srgbClr val="DCE5E3"/>
+                      </a:solidFill>
+                      <a:prstDash val="solid"/>
+                      <a:round/>
+                      <a:headEnd type="none" w="med" len="med"/>
+                      <a:tailEnd type="none" w="med" len="med"/>
+                    </a:lnT>
+                    <a:lnB w="6350" cap="flat" cmpd="sng" algn="ctr">
+                      <a:solidFill>
+                        <a:srgbClr val="DCE5E3"/>
+                      </a:solidFill>
+                      <a:prstDash val="solid"/>
+                      <a:round/>
+                      <a:headEnd type="none" w="med" len="med"/>
+                      <a:tailEnd type="none" w="med" len="med"/>
+                    </a:lnB>
+                    <a:solidFill>
+                      <a:schemeClr val="bg1"/>
+                    </a:solidFill>
+                  </a:tcPr>
+                </a:tc>
+                <a:tc>
+                  <a:txBody>
+                    <a:bodyPr/>
+                    <a:lstStyle/>
+                    <a:p>
+                      <a:pPr algn="r" indent="0" marL="0">
+                        <a:buNone/>
+                      </a:pPr>
+                      <a:r>
+                        <a:rPr lang="en-US" sz="1400" dirty="0">
+                          <a:solidFill>
+                            <a:schemeClr val="tx1"/>
+                          </a:solidFill>
+                        </a:rPr>
+                        <a:t>0.873</a:t>
+                      </a:r>
+                      <a:endParaRPr lang="en-US" sz="1400" dirty="0"/>
+                    </a:p>
+                  </a:txBody>
+                  <a:tcPr marL="91440" marR="91440" marT="45720" marB="45720" anchor="ctr">
+                    <a:lnL w="6350" cap="flat" cmpd="sng" algn="ctr">
+                      <a:solidFill>
+                        <a:srgbClr val="DCE5E3"/>
+                      </a:solidFill>
+                      <a:prstDash val="solid"/>
+                      <a:round/>
+                      <a:headEnd type="none" w="med" len="med"/>
+                      <a:tailEnd type="none" w="med" len="med"/>
+                    </a:lnL>
+                    <a:lnR w="6350" cap="flat" cmpd="sng" algn="ctr">
+                      <a:solidFill>
+                        <a:srgbClr val="DCE5E3"/>
+                      </a:solidFill>
+                      <a:prstDash val="solid"/>
+                      <a:round/>
+                      <a:headEnd type="none" w="med" len="med"/>
+                      <a:tailEnd type="none" w="med" len="med"/>
+                    </a:lnR>
+                    <a:lnT w="6350" cap="flat" cmpd="sng" algn="ctr">
+                      <a:solidFill>
+                        <a:srgbClr val="DCE5E3"/>
+                      </a:solidFill>
+                      <a:prstDash val="solid"/>
+                      <a:round/>
+                      <a:headEnd type="none" w="med" len="med"/>
+                      <a:tailEnd type="none" w="med" len="med"/>
+                    </a:lnT>
+                    <a:lnB w="6350" cap="flat" cmpd="sng" algn="ctr">
+                      <a:solidFill>
+                        <a:srgbClr val="DCE5E3"/>
+                      </a:solidFill>
+                      <a:prstDash val="solid"/>
+                      <a:round/>
+                      <a:headEnd type="none" w="med" len="med"/>
+                      <a:tailEnd type="none" w="med" len="med"/>
+                    </a:lnB>
+                    <a:solidFill>
+                      <a:schemeClr val="bg1"/>
+                    </a:solidFill>
+                  </a:tcPr>
+                </a:tc>
+                <a:tc>
+                  <a:txBody>
+                    <a:bodyPr/>
+                    <a:lstStyle/>
+                    <a:p>
+                      <a:pPr algn="r" indent="0" marL="0">
+                        <a:buNone/>
+                      </a:pPr>
+                      <a:r>
+                        <a:rPr lang="en-US" sz="1400" dirty="0">
+                          <a:solidFill>
+                            <a:schemeClr val="tx1"/>
+                          </a:solidFill>
+                        </a:rPr>
+                        <a:t>0.875</a:t>
+                      </a:r>
+                      <a:endParaRPr lang="en-US" sz="1400" dirty="0"/>
+                    </a:p>
+                  </a:txBody>
+                  <a:tcPr marL="91440" marR="91440" marT="45720" marB="45720" anchor="ctr">
+                    <a:lnL w="6350" cap="flat" cmpd="sng" algn="ctr">
+                      <a:solidFill>
+                        <a:srgbClr val="DCE5E3"/>
+                      </a:solidFill>
+                      <a:prstDash val="solid"/>
+                      <a:round/>
+                      <a:headEnd type="none" w="med" len="med"/>
+                      <a:tailEnd type="none" w="med" len="med"/>
+                    </a:lnL>
+                    <a:lnR w="6350" cap="flat" cmpd="sng" algn="ctr">
+                      <a:solidFill>
+                        <a:srgbClr val="DCE5E3"/>
+                      </a:solidFill>
+                      <a:prstDash val="solid"/>
+                      <a:round/>
+                      <a:headEnd type="none" w="med" len="med"/>
+                      <a:tailEnd type="none" w="med" len="med"/>
+                    </a:lnR>
+                    <a:lnT w="6350" cap="flat" cmpd="sng" algn="ctr">
+                      <a:solidFill>
+                        <a:srgbClr val="DCE5E3"/>
+                      </a:solidFill>
+                      <a:prstDash val="solid"/>
+                      <a:round/>
+                      <a:headEnd type="none" w="med" len="med"/>
+                      <a:tailEnd type="none" w="med" len="med"/>
+                    </a:lnT>
+                    <a:lnB w="6350" cap="flat" cmpd="sng" algn="ctr">
+                      <a:solidFill>
+                        <a:srgbClr val="DCE5E3"/>
+                      </a:solidFill>
+                      <a:prstDash val="solid"/>
+                      <a:round/>
+                      <a:headEnd type="none" w="med" len="med"/>
+                      <a:tailEnd type="none" w="med" len="med"/>
+                    </a:lnB>
+                    <a:solidFill>
+                      <a:schemeClr val="bg1"/>
+                    </a:solidFill>
+                  </a:tcPr>
+                </a:tc>
+              </a:tr>
+              <a:tr h="411480">
+                <a:tc>
+                  <a:txBody>
+                    <a:bodyPr/>
+                    <a:lstStyle/>
+                    <a:p>
+                      <a:pPr algn="l" indent="0" marL="0">
+                        <a:buNone/>
+                      </a:pPr>
+                      <a:r>
+                        <a:rPr lang="en-US" sz="1400" dirty="0">
+                          <a:solidFill>
+                            <a:schemeClr val="tx1"/>
+                          </a:solidFill>
+                        </a:rPr>
+                        <a:t>Simulated, smooth signals (5 seeds)</a:t>
+                      </a:r>
+                      <a:endParaRPr lang="en-US" sz="1400" dirty="0"/>
+                    </a:p>
+                  </a:txBody>
+                  <a:tcPr marL="91440" marR="91440" marT="45720" marB="45720" anchor="ctr">
+                    <a:lnL w="6350" cap="flat" cmpd="sng" algn="ctr">
+                      <a:solidFill>
+                        <a:srgbClr val="DCE5E3"/>
+                      </a:solidFill>
+                      <a:prstDash val="solid"/>
+                      <a:round/>
+                      <a:headEnd type="none" w="med" len="med"/>
+                      <a:tailEnd type="none" w="med" len="med"/>
+                    </a:lnL>
+                    <a:lnR w="6350" cap="flat" cmpd="sng" algn="ctr">
+                      <a:solidFill>
+                        <a:srgbClr val="DCE5E3"/>
+                      </a:solidFill>
+                      <a:prstDash val="solid"/>
+                      <a:round/>
+                      <a:headEnd type="none" w="med" len="med"/>
+                      <a:tailEnd type="none" w="med" len="med"/>
+                    </a:lnR>
+                    <a:lnT w="6350" cap="flat" cmpd="sng" algn="ctr">
+                      <a:solidFill>
+                        <a:srgbClr val="DCE5E3"/>
+                      </a:solidFill>
+                      <a:prstDash val="solid"/>
+                      <a:round/>
+                      <a:headEnd type="none" w="med" len="med"/>
+                      <a:tailEnd type="none" w="med" len="med"/>
+                    </a:lnT>
+                    <a:lnB w="6350" cap="flat" cmpd="sng" algn="ctr">
+                      <a:solidFill>
+                        <a:srgbClr val="DCE5E3"/>
+                      </a:solidFill>
+                      <a:prstDash val="solid"/>
+                      <a:round/>
+                      <a:headEnd type="none" w="med" len="med"/>
+                      <a:tailEnd type="none" w="med" len="med"/>
+                    </a:lnB>
+                    <a:solidFill>
+                      <a:schemeClr val="bg1"/>
+                    </a:solidFill>
+                  </a:tcPr>
+                </a:tc>
+                <a:tc>
+                  <a:txBody>
+                    <a:bodyPr/>
+                    <a:lstStyle/>
+                    <a:p>
+                      <a:pPr algn="r" indent="0" marL="0">
+                        <a:buNone/>
+                      </a:pPr>
+                      <a:r>
+                        <a:rPr lang="en-US" sz="1400" dirty="0">
+                          <a:solidFill>
+                            <a:schemeClr val="tx1"/>
+                          </a:solidFill>
+                        </a:rPr>
+                        <a:t>0.866</a:t>
+                      </a:r>
+                      <a:endParaRPr lang="en-US" sz="1400" dirty="0"/>
+                    </a:p>
+                  </a:txBody>
+                  <a:tcPr marL="91440" marR="91440" marT="45720" marB="45720" anchor="ctr">
+                    <a:lnL w="6350" cap="flat" cmpd="sng" algn="ctr">
+                      <a:solidFill>
+                        <a:srgbClr val="DCE5E3"/>
+                      </a:solidFill>
+                      <a:prstDash val="solid"/>
+                      <a:round/>
+                      <a:headEnd type="none" w="med" len="med"/>
+                      <a:tailEnd type="none" w="med" len="med"/>
+                    </a:lnL>
+                    <a:lnR w="6350" cap="flat" cmpd="sng" algn="ctr">
+                      <a:solidFill>
+                        <a:srgbClr val="DCE5E3"/>
+                      </a:solidFill>
+                      <a:prstDash val="solid"/>
+                      <a:round/>
+                      <a:headEnd type="none" w="med" len="med"/>
+                      <a:tailEnd type="none" w="med" len="med"/>
+                    </a:lnR>
+                    <a:lnT w="6350" cap="flat" cmpd="sng" algn="ctr">
+                      <a:solidFill>
+                        <a:srgbClr val="DCE5E3"/>
+                      </a:solidFill>
+                      <a:prstDash val="solid"/>
+                      <a:round/>
+                      <a:headEnd type="none" w="med" len="med"/>
+                      <a:tailEnd type="none" w="med" len="med"/>
+                    </a:lnT>
+                    <a:lnB w="6350" cap="flat" cmpd="sng" algn="ctr">
+                      <a:solidFill>
+                        <a:srgbClr val="DCE5E3"/>
+                      </a:solidFill>
+                      <a:prstDash val="solid"/>
+                      <a:round/>
+                      <a:headEnd type="none" w="med" len="med"/>
+                      <a:tailEnd type="none" w="med" len="med"/>
+                    </a:lnB>
+                    <a:solidFill>
+                      <a:schemeClr val="bg1"/>
+                    </a:solidFill>
+                  </a:tcPr>
+                </a:tc>
+                <a:tc>
+                  <a:txBody>
+                    <a:bodyPr/>
+                    <a:lstStyle/>
+                    <a:p>
+                      <a:pPr algn="r" indent="0" marL="0">
+                        <a:buNone/>
+                      </a:pPr>
+                      <a:r>
+                        <a:rPr lang="en-US" sz="1400" dirty="0">
+                          <a:solidFill>
+                            <a:schemeClr val="tx1"/>
+                          </a:solidFill>
+                        </a:rPr>
+                        <a:t>0.868</a:t>
+                      </a:r>
+                      <a:endParaRPr lang="en-US" sz="1400" dirty="0"/>
+                    </a:p>
+                  </a:txBody>
+                  <a:tcPr marL="91440" marR="91440" marT="45720" marB="45720" anchor="ctr">
+                    <a:lnL w="6350" cap="flat" cmpd="sng" algn="ctr">
+                      <a:solidFill>
+                        <a:srgbClr val="DCE5E3"/>
+                      </a:solidFill>
+                      <a:prstDash val="solid"/>
+                      <a:round/>
+                      <a:headEnd type="none" w="med" len="med"/>
+                      <a:tailEnd type="none" w="med" len="med"/>
+                    </a:lnL>
+                    <a:lnR w="6350" cap="flat" cmpd="sng" algn="ctr">
+                      <a:solidFill>
+                        <a:srgbClr val="DCE5E3"/>
+                      </a:solidFill>
+                      <a:prstDash val="solid"/>
+                      <a:round/>
+                      <a:headEnd type="none" w="med" len="med"/>
+                      <a:tailEnd type="none" w="med" len="med"/>
+                    </a:lnR>
+                    <a:lnT w="6350" cap="flat" cmpd="sng" algn="ctr">
+                      <a:solidFill>
+                        <a:srgbClr val="DCE5E3"/>
+                      </a:solidFill>
+                      <a:prstDash val="solid"/>
+                      <a:round/>
+                      <a:headEnd type="none" w="med" len="med"/>
+                      <a:tailEnd type="none" w="med" len="med"/>
+                    </a:lnT>
+                    <a:lnB w="6350" cap="flat" cmpd="sng" algn="ctr">
+                      <a:solidFill>
+                        <a:srgbClr val="DCE5E3"/>
+                      </a:solidFill>
+                      <a:prstDash val="solid"/>
+                      <a:round/>
+                      <a:headEnd type="none" w="med" len="med"/>
+                      <a:tailEnd type="none" w="med" len="med"/>
+                    </a:lnB>
+                    <a:solidFill>
+                      <a:schemeClr val="bg1"/>
+                    </a:solidFill>
+                  </a:tcPr>
+                </a:tc>
+              </a:tr>
+              <a:tr h="411480">
+                <a:tc>
+                  <a:txBody>
+                    <a:bodyPr/>
+                    <a:lstStyle/>
+                    <a:p>
+                      <a:pPr algn="l" indent="0" marL="0">
+                        <a:buNone/>
+                      </a:pPr>
+                      <a:r>
+                        <a:rPr lang="en-US" sz="1400" dirty="0">
+                          <a:solidFill>
+                            <a:schemeClr val="tx1"/>
+                          </a:solidFill>
+                        </a:rPr>
+                        <a:t>Trainable parameters</a:t>
+                      </a:r>
+                      <a:endParaRPr lang="en-US" sz="1400" dirty="0"/>
+                    </a:p>
+                  </a:txBody>
+                  <a:tcPr marL="91440" marR="91440" marT="45720" marB="45720" anchor="ctr">
+                    <a:lnL w="6350" cap="flat" cmpd="sng" algn="ctr">
+                      <a:solidFill>
+                        <a:srgbClr val="DCE5E3"/>
+                      </a:solidFill>
+                      <a:prstDash val="solid"/>
+                      <a:round/>
+                      <a:headEnd type="none" w="med" len="med"/>
+                      <a:tailEnd type="none" w="med" len="med"/>
+                    </a:lnL>
+                    <a:lnR w="6350" cap="flat" cmpd="sng" algn="ctr">
+                      <a:solidFill>
+                        <a:srgbClr val="DCE5E3"/>
+                      </a:solidFill>
+                      <a:prstDash val="solid"/>
+                      <a:round/>
+                      <a:headEnd type="none" w="med" len="med"/>
+                      <a:tailEnd type="none" w="med" len="med"/>
+                    </a:lnR>
+                    <a:lnT w="6350" cap="flat" cmpd="sng" algn="ctr">
+                      <a:solidFill>
+                        <a:srgbClr val="DCE5E3"/>
+                      </a:solidFill>
+                      <a:prstDash val="solid"/>
+                      <a:round/>
+                      <a:headEnd type="none" w="med" len="med"/>
+                      <a:tailEnd type="none" w="med" len="med"/>
+                    </a:lnT>
+                    <a:lnB w="6350" cap="flat" cmpd="sng" algn="ctr">
+                      <a:solidFill>
+                        <a:srgbClr val="DCE5E3"/>
+                      </a:solidFill>
+                      <a:prstDash val="solid"/>
+                      <a:round/>
+                      <a:headEnd type="none" w="med" len="med"/>
+                      <a:tailEnd type="none" w="med" len="med"/>
+                    </a:lnB>
+                    <a:solidFill>
+                      <a:schemeClr val="bg1"/>
+                    </a:solidFill>
+                  </a:tcPr>
+                </a:tc>
+                <a:tc>
+                  <a:txBody>
+                    <a:bodyPr/>
+                    <a:lstStyle/>
+                    <a:p>
+                      <a:pPr algn="r" indent="0" marL="0">
+                        <a:buNone/>
+                      </a:pPr>
+                      <a:r>
+                        <a:rPr lang="en-US" sz="1400" dirty="0">
+                          <a:solidFill>
+                            <a:schemeClr val="tx1"/>
+                          </a:solidFill>
+                        </a:rPr>
+                        <a:t>7.6k</a:t>
+                      </a:r>
+                      <a:endParaRPr lang="en-US" sz="1400" dirty="0"/>
+                    </a:p>
+                  </a:txBody>
+                  <a:tcPr marL="91440" marR="91440" marT="45720" marB="45720" anchor="ctr">
+                    <a:lnL w="6350" cap="flat" cmpd="sng" algn="ctr">
+                      <a:solidFill>
+                        <a:srgbClr val="DCE5E3"/>
+                      </a:solidFill>
+                      <a:prstDash val="solid"/>
+                      <a:round/>
+                      <a:headEnd type="none" w="med" len="med"/>
+                      <a:tailEnd type="none" w="med" len="med"/>
+                    </a:lnL>
+                    <a:lnR w="6350" cap="flat" cmpd="sng" algn="ctr">
+                      <a:solidFill>
+                        <a:srgbClr val="DCE5E3"/>
+                      </a:solidFill>
+                      <a:prstDash val="solid"/>
+                      <a:round/>
+                      <a:headEnd type="none" w="med" len="med"/>
+                      <a:tailEnd type="none" w="med" len="med"/>
+                    </a:lnR>
+                    <a:lnT w="6350" cap="flat" cmpd="sng" algn="ctr">
+                      <a:solidFill>
+                        <a:srgbClr val="DCE5E3"/>
+                      </a:solidFill>
+                      <a:prstDash val="solid"/>
+                      <a:round/>
+                      <a:headEnd type="none" w="med" len="med"/>
+                      <a:tailEnd type="none" w="med" len="med"/>
+                    </a:lnT>
+                    <a:lnB w="6350" cap="flat" cmpd="sng" algn="ctr">
+                      <a:solidFill>
+                        <a:srgbClr val="DCE5E3"/>
+                      </a:solidFill>
+                      <a:prstDash val="solid"/>
+                      <a:round/>
+                      <a:headEnd type="none" w="med" len="med"/>
+                      <a:tailEnd type="none" w="med" len="med"/>
+                    </a:lnB>
+                    <a:solidFill>
+                      <a:schemeClr val="bg1"/>
+                    </a:solidFill>
+                  </a:tcPr>
+                </a:tc>
+                <a:tc>
+                  <a:txBody>
+                    <a:bodyPr/>
+                    <a:lstStyle/>
+                    <a:p>
+                      <a:pPr algn="r" indent="0" marL="0">
+                        <a:buNone/>
+                      </a:pPr>
+                      <a:r>
+                        <a:rPr lang="en-US" sz="1400" dirty="0">
+                          <a:solidFill>
+                            <a:schemeClr val="tx1"/>
+                          </a:solidFill>
+                        </a:rPr>
+                        <a:t>11.3k</a:t>
+                      </a:r>
+                      <a:endParaRPr lang="en-US" sz="1400" dirty="0"/>
+                    </a:p>
+                  </a:txBody>
+                  <a:tcPr marL="91440" marR="91440" marT="45720" marB="45720" anchor="ctr">
+                    <a:lnL w="6350" cap="flat" cmpd="sng" algn="ctr">
+                      <a:solidFill>
+                        <a:srgbClr val="DCE5E3"/>
+                      </a:solidFill>
+                      <a:prstDash val="solid"/>
+                      <a:round/>
+                      <a:headEnd type="none" w="med" len="med"/>
+                      <a:tailEnd type="none" w="med" len="med"/>
+                    </a:lnL>
+                    <a:lnR w="6350" cap="flat" cmpd="sng" algn="ctr">
+                      <a:solidFill>
+                        <a:srgbClr val="DCE5E3"/>
+                      </a:solidFill>
+                      <a:prstDash val="solid"/>
+                      <a:round/>
+                      <a:headEnd type="none" w="med" len="med"/>
+                      <a:tailEnd type="none" w="med" len="med"/>
+                    </a:lnR>
+                    <a:lnT w="6350" cap="flat" cmpd="sng" algn="ctr">
+                      <a:solidFill>
+                        <a:srgbClr val="DCE5E3"/>
+                      </a:solidFill>
+                      <a:prstDash val="solid"/>
+                      <a:round/>
+                      <a:headEnd type="none" w="med" len="med"/>
+                      <a:tailEnd type="none" w="med" len="med"/>
+                    </a:lnT>
+                    <a:lnB w="6350" cap="flat" cmpd="sng" algn="ctr">
+                      <a:solidFill>
+                        <a:srgbClr val="DCE5E3"/>
+                      </a:solidFill>
+                      <a:prstDash val="solid"/>
+                      <a:round/>
+                      <a:headEnd type="none" w="med" len="med"/>
+                      <a:tailEnd type="none" w="med" len="med"/>
+                    </a:lnB>
+                    <a:solidFill>
+                      <a:schemeClr val="bg1"/>
+                    </a:solidFill>
+                  </a:tcPr>
+                </a:tc>
+              </a:tr>
+              <a:tr h="411480">
+                <a:tc>
+                  <a:txBody>
+                    <a:bodyPr/>
+                    <a:lstStyle/>
+                    <a:p>
+                      <a:pPr algn="l" indent="0" marL="0">
+                        <a:buNone/>
+                      </a:pPr>
+                      <a:r>
+                        <a:rPr lang="en-US" sz="1400" dirty="0">
+                          <a:solidFill>
+                            <a:schemeClr val="tx1"/>
+                          </a:solidFill>
+                        </a:rPr>
+                        <a:t>Train time: real / 100k simulated</a:t>
+                      </a:r>
+                      <a:endParaRPr lang="en-US" sz="1400" dirty="0"/>
+                    </a:p>
+                  </a:txBody>
+                  <a:tcPr marL="91440" marR="91440" marT="45720" marB="45720" anchor="ctr">
+                    <a:lnL w="6350" cap="flat" cmpd="sng" algn="ctr">
+                      <a:solidFill>
+                        <a:srgbClr val="DCE5E3"/>
+                      </a:solidFill>
+                      <a:prstDash val="solid"/>
+                      <a:round/>
+                      <a:headEnd type="none" w="med" len="med"/>
+                      <a:tailEnd type="none" w="med" len="med"/>
+                    </a:lnL>
+                    <a:lnR w="6350" cap="flat" cmpd="sng" algn="ctr">
+                      <a:solidFill>
+                        <a:srgbClr val="DCE5E3"/>
+                      </a:solidFill>
+                      <a:prstDash val="solid"/>
+                      <a:round/>
+                      <a:headEnd type="none" w="med" len="med"/>
+                      <a:tailEnd type="none" w="med" len="med"/>
+                    </a:lnR>
+                    <a:lnT w="6350" cap="flat" cmpd="sng" algn="ctr">
+                      <a:solidFill>
+                        <a:srgbClr val="DCE5E3"/>
+                      </a:solidFill>
+                      <a:prstDash val="solid"/>
+                      <a:round/>
+                      <a:headEnd type="none" w="med" len="med"/>
+                      <a:tailEnd type="none" w="med" len="med"/>
+                    </a:lnT>
+                    <a:lnB w="6350" cap="flat" cmpd="sng" algn="ctr">
+                      <a:solidFill>
+                        <a:srgbClr val="DCE5E3"/>
+                      </a:solidFill>
+                      <a:prstDash val="solid"/>
+                      <a:round/>
+                      <a:headEnd type="none" w="med" len="med"/>
+                      <a:tailEnd type="none" w="med" len="med"/>
+                    </a:lnB>
+                    <a:solidFill>
+                      <a:schemeClr val="bg1"/>
+                    </a:solidFill>
+                  </a:tcPr>
+                </a:tc>
+                <a:tc>
+                  <a:txBody>
+                    <a:bodyPr/>
+                    <a:lstStyle/>
+                    <a:p>
+                      <a:pPr algn="r" indent="0" marL="0">
+                        <a:buNone/>
+                      </a:pPr>
+                      <a:r>
+                        <a:rPr lang="en-US" sz="1400" dirty="0">
+                          <a:solidFill>
+                            <a:schemeClr val="tx1"/>
+                          </a:solidFill>
+                        </a:rPr>
+                        <a:t>0.3 s / 3 s</a:t>
+                      </a:r>
+                      <a:endParaRPr lang="en-US" sz="1400" dirty="0"/>
+                    </a:p>
+                  </a:txBody>
+                  <a:tcPr marL="91440" marR="91440" marT="45720" marB="45720" anchor="ctr">
+                    <a:lnL w="6350" cap="flat" cmpd="sng" algn="ctr">
+                      <a:solidFill>
+                        <a:srgbClr val="DCE5E3"/>
+                      </a:solidFill>
+                      <a:prstDash val="solid"/>
+                      <a:round/>
+                      <a:headEnd type="none" w="med" len="med"/>
+                      <a:tailEnd type="none" w="med" len="med"/>
+                    </a:lnL>
+                    <a:lnR w="6350" cap="flat" cmpd="sng" algn="ctr">
+                      <a:solidFill>
+                        <a:srgbClr val="DCE5E3"/>
+                      </a:solidFill>
+                      <a:prstDash val="solid"/>
+                      <a:round/>
+                      <a:headEnd type="none" w="med" len="med"/>
+                      <a:tailEnd type="none" w="med" len="med"/>
+                    </a:lnR>
+                    <a:lnT w="6350" cap="flat" cmpd="sng" algn="ctr">
+                      <a:solidFill>
+                        <a:srgbClr val="DCE5E3"/>
+                      </a:solidFill>
+                      <a:prstDash val="solid"/>
+                      <a:round/>
+                      <a:headEnd type="none" w="med" len="med"/>
+                      <a:tailEnd type="none" w="med" len="med"/>
+                    </a:lnT>
+                    <a:lnB w="6350" cap="flat" cmpd="sng" algn="ctr">
+                      <a:solidFill>
+                        <a:srgbClr val="DCE5E3"/>
+                      </a:solidFill>
+                      <a:prstDash val="solid"/>
+                      <a:round/>
+                      <a:headEnd type="none" w="med" len="med"/>
+                      <a:tailEnd type="none" w="med" len="med"/>
+                    </a:lnB>
+                    <a:solidFill>
+                      <a:schemeClr val="bg1"/>
+                    </a:solidFill>
+                  </a:tcPr>
+                </a:tc>
+                <a:tc>
+                  <a:txBody>
+                    <a:bodyPr/>
+                    <a:lstStyle/>
+                    <a:p>
+                      <a:pPr algn="r" indent="0" marL="0">
+                        <a:buNone/>
+                      </a:pPr>
+                      <a:r>
+                        <a:rPr lang="en-US" sz="1400" dirty="0">
+                          <a:solidFill>
+                            <a:schemeClr val="tx1"/>
+                          </a:solidFill>
+                        </a:rPr>
+                        <a:t>8 s / 107 s</a:t>
+                      </a:r>
+                      <a:endParaRPr lang="en-US" sz="1400" dirty="0"/>
+                    </a:p>
+                  </a:txBody>
+                  <a:tcPr marL="91440" marR="91440" marT="45720" marB="45720" anchor="ctr">
+                    <a:lnL w="6350" cap="flat" cmpd="sng" algn="ctr">
+                      <a:solidFill>
+                        <a:srgbClr val="DCE5E3"/>
+                      </a:solidFill>
+                      <a:prstDash val="solid"/>
+                      <a:round/>
+                      <a:headEnd type="none" w="med" len="med"/>
+                      <a:tailEnd type="none" w="med" len="med"/>
+                    </a:lnL>
+                    <a:lnR w="6350" cap="flat" cmpd="sng" algn="ctr">
+                      <a:solidFill>
+                        <a:srgbClr val="DCE5E3"/>
+                      </a:solidFill>
+                      <a:prstDash val="solid"/>
+                      <a:round/>
+                      <a:headEnd type="none" w="med" len="med"/>
+                      <a:tailEnd type="none" w="med" len="med"/>
+                    </a:lnR>
+                    <a:lnT w="6350" cap="flat" cmpd="sng" algn="ctr">
+                      <a:solidFill>
+                        <a:srgbClr val="DCE5E3"/>
+                      </a:solidFill>
+                      <a:prstDash val="solid"/>
+                      <a:round/>
+                      <a:headEnd type="none" w="med" len="med"/>
+                      <a:tailEnd type="none" w="med" len="med"/>
+                    </a:lnT>
+                    <a:lnB w="6350" cap="flat" cmpd="sng" algn="ctr">
+                      <a:solidFill>
+                        <a:srgbClr val="DCE5E3"/>
+                      </a:solidFill>
+                      <a:prstDash val="solid"/>
+                      <a:round/>
+                      <a:headEnd type="none" w="med" len="med"/>
+                      <a:tailEnd type="none" w="med" len="med"/>
+                    </a:lnB>
+                    <a:solidFill>
+                      <a:schemeClr val="bg1"/>
+                    </a:solidFill>
+                  </a:tcPr>
+                </a:tc>
+              </a:tr>
+              <a:tr h="411480">
+                <a:tc>
+                  <a:txBody>
+                    <a:bodyPr/>
+                    <a:lstStyle/>
+                    <a:p>
+                      <a:pPr algn="l" indent="0" marL="0">
+                        <a:buNone/>
+                      </a:pPr>
+                      <a:r>
+                        <a:rPr lang="en-US" sz="1400" dirty="0">
+                          <a:solidFill>
+                            <a:schemeClr val="tx1"/>
+                          </a:solidFill>
+                        </a:rPr>
+                        <a:t>Built-in explanation</a:t>
+                      </a:r>
+                      <a:endParaRPr lang="en-US" sz="1400" dirty="0"/>
+                    </a:p>
+                  </a:txBody>
+                  <a:tcPr marL="91440" marR="91440" marT="45720" marB="45720" anchor="ctr">
+                    <a:lnL w="6350" cap="flat" cmpd="sng" algn="ctr">
+                      <a:solidFill>
+                        <a:srgbClr val="DCE5E3"/>
+                      </a:solidFill>
+                      <a:prstDash val="solid"/>
+                      <a:round/>
+                      <a:headEnd type="none" w="med" len="med"/>
+                      <a:tailEnd type="none" w="med" len="med"/>
+                    </a:lnL>
+                    <a:lnR w="6350" cap="flat" cmpd="sng" algn="ctr">
+                      <a:solidFill>
+                        <a:srgbClr val="DCE5E3"/>
+                      </a:solidFill>
+                      <a:prstDash val="solid"/>
+                      <a:round/>
+                      <a:headEnd type="none" w="med" len="med"/>
+                      <a:tailEnd type="none" w="med" len="med"/>
+                    </a:lnR>
+                    <a:lnT w="6350" cap="flat" cmpd="sng" algn="ctr">
+                      <a:solidFill>
+                        <a:srgbClr val="DCE5E3"/>
+                      </a:solidFill>
+                      <a:prstDash val="solid"/>
+                      <a:round/>
+                      <a:headEnd type="none" w="med" len="med"/>
+                      <a:tailEnd type="none" w="med" len="med"/>
+                    </a:lnT>
+                    <a:lnB w="6350" cap="flat" cmpd="sng" algn="ctr">
+                      <a:solidFill>
+                        <a:srgbClr val="DCE5E3"/>
+                      </a:solidFill>
+                      <a:prstDash val="solid"/>
+                      <a:round/>
+                      <a:headEnd type="none" w="med" len="med"/>
+                      <a:tailEnd type="none" w="med" len="med"/>
+                    </a:lnB>
+                    <a:solidFill>
+                      <a:schemeClr val="bg1"/>
+                    </a:solidFill>
+                  </a:tcPr>
+                </a:tc>
+                <a:tc>
+                  <a:txBody>
+                    <a:bodyPr/>
+                    <a:lstStyle/>
+                    <a:p>
+                      <a:pPr algn="r" indent="0" marL="0">
+                        <a:buNone/>
+                      </a:pPr>
+                      <a:r>
+                        <a:rPr lang="en-US" sz="1400" dirty="0">
+                          <a:solidFill>
+                            <a:schemeClr val="tx1"/>
+                          </a:solidFill>
+                        </a:rPr>
+                        <a:t>None</a:t>
+                      </a:r>
+                      <a:endParaRPr lang="en-US" sz="1400" dirty="0"/>
+                    </a:p>
+                  </a:txBody>
+                  <a:tcPr marL="91440" marR="91440" marT="45720" marB="45720" anchor="ctr">
+                    <a:lnL w="6350" cap="flat" cmpd="sng" algn="ctr">
+                      <a:solidFill>
+                        <a:srgbClr val="DCE5E3"/>
+                      </a:solidFill>
+                      <a:prstDash val="solid"/>
+                      <a:round/>
+                      <a:headEnd type="none" w="med" len="med"/>
+                      <a:tailEnd type="none" w="med" len="med"/>
+                    </a:lnL>
+                    <a:lnR w="6350" cap="flat" cmpd="sng" algn="ctr">
+                      <a:solidFill>
+                        <a:srgbClr val="DCE5E3"/>
+                      </a:solidFill>
+                      <a:prstDash val="solid"/>
+                      <a:round/>
+                      <a:headEnd type="none" w="med" len="med"/>
+                      <a:tailEnd type="none" w="med" len="med"/>
+                    </a:lnR>
+                    <a:lnT w="6350" cap="flat" cmpd="sng" algn="ctr">
+                      <a:solidFill>
+                        <a:srgbClr val="DCE5E3"/>
+                      </a:solidFill>
+                      <a:prstDash val="solid"/>
+                      <a:round/>
+                      <a:headEnd type="none" w="med" len="med"/>
+                      <a:tailEnd type="none" w="med" len="med"/>
+                    </a:lnT>
+                    <a:lnB w="6350" cap="flat" cmpd="sng" algn="ctr">
+                      <a:solidFill>
+                        <a:srgbClr val="DCE5E3"/>
+                      </a:solidFill>
+                      <a:prstDash val="solid"/>
+                      <a:round/>
+                      <a:headEnd type="none" w="med" len="med"/>
+                      <a:tailEnd type="none" w="med" len="med"/>
+                    </a:lnB>
+                    <a:solidFill>
+                      <a:schemeClr val="bg1"/>
+                    </a:solidFill>
+                  </a:tcPr>
+                </a:tc>
+                <a:tc>
+                  <a:txBody>
+                    <a:bodyPr/>
+                    <a:lstStyle/>
+                    <a:p>
+                      <a:pPr algn="r" indent="0" marL="0">
+                        <a:buNone/>
+                      </a:pPr>
+                      <a:r>
+                        <a:rPr lang="en-US" sz="1400" dirty="0">
+                          <a:solidFill>
+                            <a:schemeClr val="tx1"/>
+                          </a:solidFill>
+                        </a:rPr>
+                        <a:t>Attention masks</a:t>
+                      </a:r>
+                      <a:endParaRPr lang="en-US" sz="1400" dirty="0"/>
+                    </a:p>
+                  </a:txBody>
+                  <a:tcPr marL="91440" marR="91440" marT="45720" marB="45720" anchor="ctr">
+                    <a:lnL w="6350" cap="flat" cmpd="sng" algn="ctr">
+                      <a:solidFill>
+                        <a:srgbClr val="DCE5E3"/>
+                      </a:solidFill>
+                      <a:prstDash val="solid"/>
+                      <a:round/>
+                      <a:headEnd type="none" w="med" len="med"/>
+                      <a:tailEnd type="none" w="med" len="med"/>
+                    </a:lnL>
+                    <a:lnR w="6350" cap="flat" cmpd="sng" algn="ctr">
+                      <a:solidFill>
+                        <a:srgbClr val="DCE5E3"/>
+                      </a:solidFill>
+                      <a:prstDash val="solid"/>
+                      <a:round/>
+                      <a:headEnd type="none" w="med" len="med"/>
+                      <a:tailEnd type="none" w="med" len="med"/>
+                    </a:lnR>
+                    <a:lnT w="6350" cap="flat" cmpd="sng" algn="ctr">
+                      <a:solidFill>
+                        <a:srgbClr val="DCE5E3"/>
+                      </a:solidFill>
+                      <a:prstDash val="solid"/>
+                      <a:round/>
+                      <a:headEnd type="none" w="med" len="med"/>
+                      <a:tailEnd type="none" w="med" len="med"/>
+                    </a:lnT>
+                    <a:lnB w="6350" cap="flat" cmpd="sng" algn="ctr">
+                      <a:solidFill>
+                        <a:srgbClr val="DCE5E3"/>
+                      </a:solidFill>
+                      <a:prstDash val="solid"/>
+                      <a:round/>
+                      <a:headEnd type="none" w="med" len="med"/>
+                      <a:tailEnd type="none" w="med" len="med"/>
+                    </a:lnB>
+                    <a:solidFill>
+                      <a:schemeClr val="bg1"/>
+                    </a:solidFill>
+                  </a:tcPr>
+                </a:tc>
+              </a:tr>
+            </a:tbl>
+          </a:graphicData>
+        </a:graphic>
+      </p:graphicFrame>
+      <p:sp>
+        <p:nvSpPr>
+          <p:cNvPr id="4" name="Text 1"/>
+          <p:cNvSpPr txBox="1"/>
+          <p:nvPr/>
+        </p:nvSpPr>
+        <p:spPr>
+          <a:xfrm>
+            <a:off x="7909560" y="1417320"/>
+            <a:ext cx="3749039" cy="731520"/>
+          </a:xfrm>
+          <a:prstGeom prst="rect">
+            <a:avLst/>
+          </a:prstGeom>
+          <a:noFill/>
+          <a:ln/>
+        </p:spPr>
+        <p:txBody>
+          <a:bodyPr wrap="square" lIns="0" tIns="0" rIns="0" bIns="0" rtlCol="0" anchor="b"/>
+          <a:lstStyle/>
+          <a:p>
+            <a:pPr indent="0" marL="0">
+              <a:buNone/>
+            </a:pPr>
+            <a:r>
+              <a:rPr lang="en-US" sz="4000" b="1" dirty="0">
+                <a:solidFill>
+                  <a:schemeClr val="accent3"/>
+                </a:solidFill>
+                <a:latin typeface="Cambria" pitchFamily="34" charset="0"/>
+                <a:ea typeface="Cambria" pitchFamily="34" charset="-122"/>
+                <a:cs typeface="Cambria" pitchFamily="34" charset="-120"/>
+              </a:rPr>
+              <a:t>+0.011</a:t>
+            </a:r>
+            <a:endParaRPr lang="en-US" sz="4000" dirty="0"/>
+          </a:p>
+        </p:txBody>
+      </p:sp>
+      <p:sp>
+        <p:nvSpPr>
+          <p:cNvPr id="5" name="Text 2"/>
+          <p:cNvSpPr txBox="1"/>
+          <p:nvPr/>
+        </p:nvSpPr>
+        <p:spPr>
+          <a:xfrm>
+            <a:off x="7909560" y="2194560"/>
+            <a:ext cx="3749039" cy="685800"/>
+          </a:xfrm>
+          <a:prstGeom prst="rect">
+            <a:avLst/>
+          </a:prstGeom>
+          <a:noFill/>
+          <a:ln/>
+        </p:spPr>
+        <p:txBody>
+          <a:bodyPr wrap="square" lIns="0" tIns="0" rIns="0" bIns="0" rtlCol="0" anchor="t"/>
+          <a:lstStyle/>
+          <a:p>
+            <a:pPr indent="0" marL="0">
+              <a:buNone/>
+            </a:pPr>
+            <a:r>
+              <a:rPr lang="en-US" sz="1300" dirty="0">
+                <a:solidFill>
+                  <a:schemeClr val="accent4"/>
+                </a:solidFill>
+              </a:rPr>
+              <a:t>TabNet − MLP test ROC-AUC on real data; 95% CI −0.030 to +0.054, so not a real win</a:t>
+            </a:r>
+            <a:endParaRPr lang="en-US" sz="1300" dirty="0"/>
+          </a:p>
+        </p:txBody>
+      </p:sp>
+      <p:sp>
+        <p:nvSpPr>
+          <p:cNvPr id="7" name="Text 4"/>
+          <p:cNvSpPr txBox="1"/>
+          <p:nvPr/>
+        </p:nvSpPr>
+        <p:spPr>
+          <a:xfrm>
+            <a:off x="7909560" y="3154680"/>
+            <a:ext cx="3749039" cy="731520"/>
+          </a:xfrm>
+          <a:prstGeom prst="rect">
+            <a:avLst/>
+          </a:prstGeom>
+          <a:noFill/>
+          <a:ln/>
+        </p:spPr>
+        <p:txBody>
+          <a:bodyPr wrap="square" lIns="0" tIns="0" rIns="0" bIns="0" rtlCol="0" anchor="b"/>
+          <a:lstStyle/>
+          <a:p>
+            <a:pPr indent="0" marL="0">
+              <a:buNone/>
+            </a:pPr>
+            <a:r>
+              <a:rPr lang="en-US" sz="4000" b="1" dirty="0">
+                <a:solidFill>
+                  <a:schemeClr val="accent1"/>
+                </a:solidFill>
+                <a:latin typeface="Cambria" pitchFamily="34" charset="0"/>
+                <a:ea typeface="Cambria" pitchFamily="34" charset="-122"/>
+                <a:cs typeface="Cambria" pitchFamily="34" charset="-120"/>
+              </a:rPr>
+              <a:t>27×</a:t>
+            </a:r>
+            <a:endParaRPr lang="en-US" sz="4000" dirty="0"/>
+          </a:p>
+        </p:txBody>
+      </p:sp>
+      <p:sp>
+        <p:nvSpPr>
+          <p:cNvPr id="8" name="Text 5"/>
+          <p:cNvSpPr txBox="1"/>
+          <p:nvPr/>
+        </p:nvSpPr>
+        <p:spPr>
+          <a:xfrm>
+            <a:off x="7909560" y="3931920"/>
+            <a:ext cx="3749039" cy="685800"/>
+          </a:xfrm>
+          <a:prstGeom prst="rect">
+            <a:avLst/>
+          </a:prstGeom>
+          <a:noFill/>
+          <a:ln/>
+        </p:spPr>
+        <p:txBody>
+          <a:bodyPr wrap="square" lIns="0" tIns="0" rIns="0" bIns="0" rtlCol="0" anchor="t"/>
+          <a:lstStyle/>
+          <a:p>
+            <a:pPr indent="0" marL="0">
+              <a:buNone/>
+            </a:pPr>
+            <a:r>
+              <a:rPr lang="en-US" sz="1300" dirty="0">
+                <a:solidFill>
+                  <a:schemeClr val="accent4"/>
+                </a:solidFill>
+              </a:rPr>
+              <a:t>slower for TabNet to train on real data (35× on 100k simulated deals)</a:t>
+            </a:r>
+            <a:endParaRPr lang="en-US" sz="1300" dirty="0"/>
+          </a:p>
+        </p:txBody>
+      </p:sp>
+      <p:sp>
+        <p:nvSpPr>
+          <p:cNvPr id="11" name="Text 8"/>
+          <p:cNvSpPr txBox="1"/>
+          <p:nvPr/>
+        </p:nvSpPr>
+        <p:spPr>
+          <a:xfrm>
+            <a:off x="548640" y="4937760"/>
+            <a:ext cx="11091672" cy="731520"/>
+          </a:xfrm>
+          <a:prstGeom prst="rect">
+            <a:avLst/>
+          </a:prstGeom>
+          <a:noFill/>
+          <a:ln/>
+        </p:spPr>
+        <p:txBody>
+          <a:bodyPr wrap="square" lIns="0" tIns="0" rIns="0" bIns="0" rtlCol="0" anchor="t"/>
+          <a:lstStyle/>
+          <a:p>
+            <a:pPr indent="0" marL="0">
+              <a:buNone/>
+            </a:pPr>
+            <a:r>
+              <a:rPr lang="en-US" sz="1500" i="1" dirty="0">
+                <a:solidFill>
+                  <a:schemeClr val="accent4"/>
+                </a:solidFill>
+              </a:rPr>
+              <a:t>Accuracy differences sit inside the noise in every setting. TabNet adds built-in feature attention, at a much higher training cost.</a:t>
+            </a:r>
+            <a:endParaRPr lang="en-US" sz="1300" dirty="0"/>
+          </a:p>
+        </p:txBody>
+      </p:sp>
+      <p:sp>
+        <p:nvSpPr>
+          <p:cNvPr id="25" name="Slide Number Placeholder 0"/>
+          <p:cNvSpPr>
+            <a:spLocks noGrp="1"/>
+          </p:cNvSpPr>
+          <p:nvPr>
+            <p:ph type="sldNum" sz="quarter" idx="4294967295"/>
+          </p:nvPr>
+        </p:nvSpPr>
+        <p:spPr>
+          <a:xfrm>
+            <a:off x="11155680" y="6355080"/>
+            <a:ext cx="548640" cy="274320"/>
+          </a:xfrm>
+          <a:prstGeom prst="rect">
+            <a:avLst/>
+          </a:prstGeom>
+          <a:extLst>
+            <a:ext uri="{C572A759-6A51-4108-AA02-DFA0A04FC94B}">
+              <ma14:wrappingTextBoxFlag xmlns:ma14="http://schemas.microsoft.com/office/mac/drawingml/2011/main" val="0"/>
+            </a:ext>
+          </a:extLst>
+        </p:spPr>
+        <p:txBody>
+          <a:bodyPr/>
+          <a:lstStyle>
+            <a:lvl1pPr>
+              <a:defRPr sz="1000">
+                <a:solidFill>
+                  <a:schemeClr val="accent4"/>
+                </a:solidFill>
+              </a:defRPr>
+            </a:lvl1pPr>
+          </a:lstStyle>
+          <a:p>
+            <a:pPr algn="r"/>
+            <a:fld id="{F7021451-1387-4CA6-816F-3879F97B5CBC}" type="slidenum">
+              <a:rPr b="0" lang="en-US"/>
+              <a:t>15</a:t>
+            </a:fld>
+            <a:endParaRPr lang="en-US"/>
+          </a:p>
+        </p:txBody>
+      </p:sp>
+    </p:spTree>
+  </p:cSld>
+  <p:clrMapOvr>
+    <a:masterClrMapping/>
+  </p:clrMapOvr>
+</p:sld>
+</file>
+
+<file path=ppt/slides/slide16.xml><?xml version="1.0" encoding="utf-8"?>
+<p:sld xmlns:a="http://schemas.openxmlformats.org/drawingml/2006/main" xmlns:r="http://schemas.openxmlformats.org/officeDocument/2006/relationships" xmlns:p="http://schemas.openxmlformats.org/presentationml/2006/main">
   <p:cSld name="Slide 15">
     <p:spTree>
       <p:nvGrpSpPr>
@@ -8081,7 +9958,7 @@
             <a:pPr algn="r"/>
             <a:fld id="{F7021451-1387-4CA6-816F-3879F97B5CBC}" type="slidenum">
               <a:rPr b="0" lang="en-US"/>
-              <a:t>15</a:t>
+              <a:t>16</a:t>
             </a:fld>
             <a:endParaRPr lang="en-US"/>
           </a:p>
@@ -8095,7 +9972,7 @@
 </p:sld>
 </file>
 
-<file path=ppt/slides/slide16.xml><?xml version="1.0" encoding="utf-8"?>
+<file path=ppt/slides/slide17.xml><?xml version="1.0" encoding="utf-8"?>
 <p:sld xmlns:a="http://schemas.openxmlformats.org/drawingml/2006/main" xmlns:r="http://schemas.openxmlformats.org/officeDocument/2006/relationships" xmlns:p="http://schemas.openxmlformats.org/presentationml/2006/main">
   <p:cSld name="Slide 16">
     <p:spTree>
@@ -8285,7 +10162,7 @@
                   <a:schemeClr val="tx1"/>
                 </a:solidFill>
               </a:rPr>
-              <a:t>Each open deal gets P(Won) and the factors that raise or lower it</a:t>
+              <a:t>P(Won) per deal; its top factors move the score 3.1× more than random ones</a:t>
             </a:r>
             <a:endParaRPr lang="en-US" sz="1400" dirty="0"/>
           </a:p>
@@ -8423,7 +10300,7 @@
                   <a:schemeClr val="tx1"/>
                 </a:solidFill>
               </a:rPr>
-              <a:t>Outcome columns excluded, with a leaky control to prove why</a:t>
+              <a:t>close_value alone gives AUC 1.0; it is excluded and kept only as a control</a:t>
             </a:r>
             <a:endParaRPr lang="en-US" sz="1400" dirty="0"/>
           </a:p>
@@ -8561,7 +10438,7 @@
                   <a:schemeClr val="tx1"/>
                 </a:solidFill>
               </a:rPr>
-              <a:t>Train only on outcomes known before the cutoff</a:t>
+              <a:t>Train only on known outcomes; a random split adds at most 0.04 AUC</a:t>
             </a:r>
             <a:endParaRPr lang="en-US" sz="1400" dirty="0"/>
           </a:p>
@@ -8699,7 +10576,7 @@
                   <a:schemeClr val="tx1"/>
                 </a:solidFill>
               </a:rPr>
-              <a:t>Missing accounts are flagged, not silently imputed</a:t>
+              <a:t>1,088 of 1,589 open-deal scores flagged for a missing account</a:t>
             </a:r>
             <a:endParaRPr lang="en-US" sz="1400" dirty="0"/>
           </a:p>
@@ -8837,7 +10714,7 @@
                   <a:schemeClr val="tx1"/>
                 </a:solidFill>
               </a:rPr>
-              <a:t>An oracle shows how close each model can get</a:t>
+              <a:t>Pipeline reaches 0.867 vs an oracle of 0.878 when signal exists</a:t>
             </a:r>
             <a:endParaRPr lang="en-US" sz="1400" dirty="0"/>
           </a:p>
@@ -9020,7 +10897,7 @@
             <a:pPr algn="r"/>
             <a:fld id="{F7021451-1387-4CA6-816F-3879F97B5CBC}" type="slidenum">
               <a:rPr b="0" lang="en-US"/>
-              <a:t>16</a:t>
+              <a:t>17</a:t>
             </a:fld>
             <a:endParaRPr lang="en-US"/>
           </a:p>
@@ -9034,7 +10911,7 @@
 </p:sld>
 </file>
 
-<file path=ppt/slides/slide17.xml><?xml version="1.0" encoding="utf-8"?>
+<file path=ppt/slides/slide18.xml><?xml version="1.0" encoding="utf-8"?>
 <p:sld xmlns:a="http://schemas.openxmlformats.org/drawingml/2006/main" xmlns:r="http://schemas.openxmlformats.org/officeDocument/2006/relationships" xmlns:p="http://schemas.openxmlformats.org/presentationml/2006/main">
   <p:cSld name="Slide 17">
     <p:spTree>
@@ -9646,7 +11523,7 @@
             <a:pPr algn="r"/>
             <a:fld id="{F7021451-1387-4CA6-816F-3879F97B5CBC}" type="slidenum">
               <a:rPr b="0" lang="en-US"/>
-              <a:t>17</a:t>
+              <a:t>18</a:t>
             </a:fld>
             <a:endParaRPr lang="en-US"/>
           </a:p>
@@ -9660,7 +11537,7 @@
 </p:sld>
 </file>
 
-<file path=ppt/slides/slide18.xml><?xml version="1.0" encoding="utf-8"?>
+<file path=ppt/slides/slide19.xml><?xml version="1.0" encoding="utf-8"?>
 <p:sld xmlns:a="http://schemas.openxmlformats.org/drawingml/2006/main" xmlns:r="http://schemas.openxmlformats.org/officeDocument/2006/relationships" xmlns:p="http://schemas.openxmlformats.org/presentationml/2006/main">
   <p:cSld name="Slide 18">
     <p:spTree>
@@ -12222,6 +14099,24 @@
                 </a:solidFill>
               </a:rPr>
               <a:t>Imputation, encoding and scaling are fit on training rows only</a:t>
+            </a:r>
+            <a:endParaRPr lang="en-US" sz="1600" dirty="0"/>
+          </a:p>
+          <a:p>
+            <a:pPr marL="203200" indent="-203200">
+              <a:spcAft>
+                <a:spcPts val="800"/>
+              </a:spcAft>
+              <a:buSzPct val="100000"/>
+              <a:buChar char="•"/>
+            </a:pPr>
+            <a:r>
+              <a:rPr lang="en-US" sz="1500" dirty="0">
+                <a:solidFill>
+                  <a:schemeClr val="tx1"/>
+                </a:solidFill>
+              </a:rPr>
+              <a:t>Check: a random split scores at most 0.04 AUC higher, still near chance</a:t>
             </a:r>
             <a:endParaRPr lang="en-US" sz="1600" dirty="0"/>
           </a:p>
@@ -15126,7 +17021,7 @@
                             <a:schemeClr val="tx1"/>
                           </a:solidFill>
                         </a:rPr>
-                        <a:t>0.590</a:t>
+                        <a:t>0.592</a:t>
                       </a:r>
                       <a:endParaRPr lang="en-US" sz="1400" dirty="0"/>
                     </a:p>
@@ -15248,7 +17143,7 @@
                             <a:schemeClr val="tx1"/>
                           </a:solidFill>
                         </a:rPr>
-                        <a:t>0.966</a:t>
+                        <a:t>0.978</a:t>
                       </a:r>
                       <a:endParaRPr lang="en-US" sz="1400" dirty="0"/>
                     </a:p>
@@ -15309,7 +17204,7 @@
                             <a:schemeClr val="tx1"/>
                           </a:solidFill>
                         </a:rPr>
-                        <a:t>0.739</a:t>
+                        <a:t>0.742</a:t>
                       </a:r>
                       <a:endParaRPr lang="en-US" sz="1400" dirty="0"/>
                     </a:p>
@@ -15370,7 +17265,7 @@
                             <a:schemeClr val="tx1"/>
                           </a:solidFill>
                         </a:rPr>
-                        <a:t>0.519</a:t>
+                        <a:t>0.518</a:t>
                       </a:r>
                       <a:endParaRPr lang="en-US" sz="1400" dirty="0"/>
                     </a:p>
@@ -15431,7 +17326,7 @@
                             <a:schemeClr val="tx1"/>
                           </a:solidFill>
                         </a:rPr>
-                        <a:t>0.2508</a:t>
+                        <a:t>0.2510</a:t>
                       </a:r>
                       <a:endParaRPr lang="en-US" sz="1400" dirty="0"/>
                     </a:p>
@@ -15984,7 +17879,7 @@
                             <a:schemeClr val="tx1"/>
                           </a:solidFill>
                         </a:rPr>
-                        <a:t>0.563</a:t>
+                        <a:t>0.536</a:t>
                       </a:r>
                       <a:endParaRPr lang="en-US" sz="1400" dirty="0"/>
                     </a:p>
@@ -16045,7 +17940,7 @@
                             <a:schemeClr val="tx1"/>
                           </a:solidFill>
                         </a:rPr>
-                        <a:t>0.613</a:t>
+                        <a:t>0.600</a:t>
                       </a:r>
                       <a:endParaRPr lang="en-US" sz="1400" dirty="0"/>
                     </a:p>
@@ -16106,7 +18001,7 @@
                             <a:schemeClr val="tx1"/>
                           </a:solidFill>
                         </a:rPr>
-                        <a:t>0.734</a:t>
+                        <a:t>0.678</a:t>
                       </a:r>
                       <a:endParaRPr lang="en-US" sz="1400" dirty="0"/>
                     </a:p>
@@ -16167,7 +18062,7 @@
                             <a:schemeClr val="tx1"/>
                           </a:solidFill>
                         </a:rPr>
-                        <a:t>0.669</a:t>
+                        <a:t>0.637</a:t>
                       </a:r>
                       <a:endParaRPr lang="en-US" sz="1400" dirty="0"/>
                     </a:p>
@@ -16228,7 +18123,7 @@
                             <a:schemeClr val="tx1"/>
                           </a:solidFill>
                         </a:rPr>
-                        <a:t>0.517</a:t>
+                        <a:t>0.507</a:t>
                       </a:r>
                       <a:endParaRPr lang="en-US" sz="1400" dirty="0"/>
                     </a:p>
@@ -16289,7 +18184,7 @@
                             <a:schemeClr val="tx1"/>
                           </a:solidFill>
                         </a:rPr>
-                        <a:t>0.2468</a:t>
+                        <a:t>0.2490</a:t>
                       </a:r>
                       <a:endParaRPr lang="en-US" sz="1400" dirty="0"/>
                     </a:p>
@@ -16768,6 +18663,10 @@
           </a:solidFill>
           <a:ln/>
         </p:spPr>
+        <p:txBody>
+          <a:bodyPr/>
+          <a:p/>
+        </p:txBody>
       </p:sp>
       <p:pic>
         <p:nvPicPr>
@@ -16884,6 +18783,10 @@
           </a:solidFill>
           <a:ln/>
         </p:spPr>
+        <p:txBody>
+          <a:bodyPr/>
+          <a:p/>
+        </p:txBody>
       </p:sp>
       <p:pic>
         <p:nvPicPr>
@@ -16939,7 +18842,7 @@
                   <a:schemeClr val="tx2"/>
                 </a:solidFill>
               </a:rPr>
-              <a:t>Random Forest SHAP</a:t>
+              <a:t>Checked against SHAP</a:t>
             </a:r>
             <a:endParaRPr lang="en-US" sz="1700" dirty="0"/>
           </a:p>
@@ -16975,7 +18878,7 @@
                   <a:schemeClr val="tx1"/>
                 </a:solidFill>
               </a:rPr>
-              <a:t>Separate diagnostic. Top feature: engage_quarter. Additivity error 1.8e-12.</a:t>
+              <a:t>Agrees with RF TreeSHAP (median Spearman 0.76). Resetting the top 3 factors moves P(Won) 3.1× more than random.</a:t>
             </a:r>
             <a:endParaRPr lang="en-US" sz="1400" dirty="0"/>
           </a:p>
@@ -17000,6 +18903,10 @@
           </a:solidFill>
           <a:ln/>
         </p:spPr>
+        <p:txBody>
+          <a:bodyPr/>
+          <a:p/>
+        </p:txBody>
       </p:sp>
       <p:pic>
         <p:nvPicPr>

--- a/CRM_Final.pptx
+++ b/CRM_Final.pptx
@@ -5319,6 +5319,10 @@
             </a:outerShdw>
           </a:effectLst>
         </p:spPr>
+        <p:txBody>
+          <a:bodyPr/>
+          <a:p/>
+        </p:txBody>
       </p:sp>
       <p:sp>
         <p:nvSpPr>
@@ -5339,6 +5343,10 @@
           </a:solidFill>
           <a:ln/>
         </p:spPr>
+        <p:txBody>
+          <a:bodyPr/>
+          <a:p/>
+        </p:txBody>
       </p:sp>
       <p:pic>
         <p:nvPicPr>
@@ -5790,6 +5798,10 @@
           </a:solidFill>
           <a:ln/>
         </p:spPr>
+        <p:txBody>
+          <a:bodyPr/>
+          <a:p/>
+        </p:txBody>
       </p:sp>
       <p:pic>
         <p:nvPicPr>
@@ -6224,6 +6236,10 @@
           </a:solidFill>
           <a:ln/>
         </p:spPr>
+        <p:txBody>
+          <a:bodyPr/>
+          <a:p/>
+        </p:txBody>
       </p:sp>
       <p:sp>
         <p:nvSpPr>
@@ -6542,6 +6558,10 @@
           </a:solidFill>
           <a:ln/>
         </p:spPr>
+        <p:txBody>
+          <a:bodyPr/>
+          <a:p/>
+        </p:txBody>
       </p:sp>
       <p:sp>
         <p:nvSpPr>
@@ -6562,6 +6582,10 @@
           </a:solidFill>
           <a:ln/>
         </p:spPr>
+        <p:txBody>
+          <a:bodyPr/>
+          <a:p/>
+        </p:txBody>
       </p:sp>
       <p:pic>
         <p:nvPicPr>
@@ -6720,6 +6744,10 @@
           </a:solidFill>
           <a:ln/>
         </p:spPr>
+        <p:txBody>
+          <a:bodyPr/>
+          <a:p/>
+        </p:txBody>
       </p:sp>
       <p:sp>
         <p:nvSpPr>
@@ -6740,6 +6768,10 @@
           </a:solidFill>
           <a:ln/>
         </p:spPr>
+        <p:txBody>
+          <a:bodyPr/>
+          <a:p/>
+        </p:txBody>
       </p:sp>
       <p:pic>
         <p:nvPicPr>
@@ -6898,6 +6930,10 @@
           </a:solidFill>
           <a:ln/>
         </p:spPr>
+        <p:txBody>
+          <a:bodyPr/>
+          <a:p/>
+        </p:txBody>
       </p:sp>
       <p:sp>
         <p:nvSpPr>
@@ -6918,6 +6954,10 @@
           </a:solidFill>
           <a:ln/>
         </p:spPr>
+        <p:txBody>
+          <a:bodyPr/>
+          <a:p/>
+        </p:txBody>
       </p:sp>
       <p:pic>
         <p:nvPicPr>
@@ -7076,6 +7116,10 @@
           </a:solidFill>
           <a:ln/>
         </p:spPr>
+        <p:txBody>
+          <a:bodyPr/>
+          <a:p/>
+        </p:txBody>
       </p:sp>
       <p:sp>
         <p:nvSpPr>
@@ -7096,6 +7140,10 @@
           </a:solidFill>
           <a:ln/>
         </p:spPr>
+        <p:txBody>
+          <a:bodyPr/>
+          <a:p/>
+        </p:txBody>
       </p:sp>
       <p:pic>
         <p:nvPicPr>
@@ -7427,6 +7475,10 @@
           </a:solidFill>
           <a:ln/>
         </p:spPr>
+        <p:txBody>
+          <a:bodyPr/>
+          <a:p/>
+        </p:txBody>
       </p:sp>
       <p:sp>
         <p:nvSpPr>
@@ -9511,6 +9563,10 @@
           </a:solidFill>
           <a:ln/>
         </p:spPr>
+        <p:txBody>
+          <a:bodyPr/>
+          <a:p/>
+        </p:txBody>
       </p:sp>
       <p:sp>
         <p:nvSpPr>
@@ -9680,6 +9736,10 @@
           </a:solidFill>
           <a:ln/>
         </p:spPr>
+        <p:txBody>
+          <a:bodyPr/>
+          <a:p/>
+        </p:txBody>
       </p:sp>
       <p:sp>
         <p:nvSpPr>
@@ -9847,6 +9907,10 @@
           </a:solidFill>
           <a:ln/>
         </p:spPr>
+        <p:txBody>
+          <a:bodyPr/>
+          <a:p/>
+        </p:txBody>
       </p:sp>
       <p:pic>
         <p:nvPicPr>
@@ -10051,6 +10115,10 @@
           </a:solidFill>
           <a:ln/>
         </p:spPr>
+        <p:txBody>
+          <a:bodyPr/>
+          <a:p/>
+        </p:txBody>
       </p:sp>
       <p:sp>
         <p:nvSpPr>
@@ -10071,6 +10139,10 @@
           </a:solidFill>
           <a:ln/>
         </p:spPr>
+        <p:txBody>
+          <a:bodyPr/>
+          <a:p/>
+        </p:txBody>
       </p:sp>
       <p:pic>
         <p:nvPicPr>
@@ -10189,6 +10261,10 @@
           </a:solidFill>
           <a:ln/>
         </p:spPr>
+        <p:txBody>
+          <a:bodyPr/>
+          <a:p/>
+        </p:txBody>
       </p:sp>
       <p:sp>
         <p:nvSpPr>
@@ -10209,6 +10285,10 @@
           </a:solidFill>
           <a:ln/>
         </p:spPr>
+        <p:txBody>
+          <a:bodyPr/>
+          <a:p/>
+        </p:txBody>
       </p:sp>
       <p:pic>
         <p:nvPicPr>
@@ -10327,6 +10407,10 @@
           </a:solidFill>
           <a:ln/>
         </p:spPr>
+        <p:txBody>
+          <a:bodyPr/>
+          <a:p/>
+        </p:txBody>
       </p:sp>
       <p:sp>
         <p:nvSpPr>
@@ -10347,6 +10431,10 @@
           </a:solidFill>
           <a:ln/>
         </p:spPr>
+        <p:txBody>
+          <a:bodyPr/>
+          <a:p/>
+        </p:txBody>
       </p:sp>
       <p:pic>
         <p:nvPicPr>
@@ -10465,6 +10553,10 @@
           </a:solidFill>
           <a:ln/>
         </p:spPr>
+        <p:txBody>
+          <a:bodyPr/>
+          <a:p/>
+        </p:txBody>
       </p:sp>
       <p:sp>
         <p:nvSpPr>
@@ -10485,6 +10577,10 @@
           </a:solidFill>
           <a:ln/>
         </p:spPr>
+        <p:txBody>
+          <a:bodyPr/>
+          <a:p/>
+        </p:txBody>
       </p:sp>
       <p:pic>
         <p:nvPicPr>
@@ -10603,6 +10699,10 @@
           </a:solidFill>
           <a:ln/>
         </p:spPr>
+        <p:txBody>
+          <a:bodyPr/>
+          <a:p/>
+        </p:txBody>
       </p:sp>
       <p:sp>
         <p:nvSpPr>
@@ -10623,6 +10723,10 @@
           </a:solidFill>
           <a:ln/>
         </p:spPr>
+        <p:txBody>
+          <a:bodyPr/>
+          <a:p/>
+        </p:txBody>
       </p:sp>
       <p:pic>
         <p:nvPicPr>
@@ -10741,6 +10845,10 @@
           </a:solidFill>
           <a:ln/>
         </p:spPr>
+        <p:txBody>
+          <a:bodyPr/>
+          <a:p/>
+        </p:txBody>
       </p:sp>
       <p:sp>
         <p:nvSpPr>
@@ -10761,6 +10869,10 @@
           </a:solidFill>
           <a:ln/>
         </p:spPr>
+        <p:txBody>
+          <a:bodyPr/>
+          <a:p/>
+        </p:txBody>
       </p:sp>
       <p:pic>
         <p:nvPicPr>
@@ -10852,7 +10964,7 @@
                   <a:schemeClr val="tx1"/>
                 </a:solidFill>
               </a:rPr>
-              <a:t>CPU only; same runner from CLI, tests and Colab notebook</a:t>
+              <a:t>CPU only; separate train, evaluate and predict commands</a:t>
             </a:r>
             <a:endParaRPr lang="en-US" sz="1400" dirty="0"/>
           </a:p>
@@ -10988,6 +11100,10 @@
           </a:solidFill>
           <a:ln/>
         </p:spPr>
+        <p:txBody>
+          <a:bodyPr/>
+          <a:p/>
+        </p:txBody>
       </p:sp>
       <p:pic>
         <p:nvPicPr>
@@ -11198,6 +11314,10 @@
           </a:solidFill>
           <a:ln/>
         </p:spPr>
+        <p:txBody>
+          <a:bodyPr/>
+          <a:p/>
+        </p:txBody>
       </p:sp>
       <p:pic>
         <p:nvPicPr>
@@ -11392,6 +11512,10 @@
           </a:solidFill>
           <a:ln/>
         </p:spPr>
+        <p:txBody>
+          <a:bodyPr/>
+          <a:p/>
+        </p:txBody>
       </p:sp>
       <p:sp>
         <p:nvSpPr>
@@ -11412,6 +11536,10 @@
           </a:solidFill>
           <a:ln/>
         </p:spPr>
+        <p:txBody>
+          <a:bodyPr/>
+          <a:p/>
+        </p:txBody>
       </p:sp>
       <p:pic>
         <p:nvPicPr>
@@ -11734,6 +11862,10 @@
           </a:solidFill>
           <a:ln/>
         </p:spPr>
+        <p:txBody>
+          <a:bodyPr/>
+          <a:p/>
+        </p:txBody>
       </p:sp>
       <p:sp>
         <p:nvSpPr>
@@ -11754,6 +11886,10 @@
           </a:solidFill>
           <a:ln/>
         </p:spPr>
+        <p:txBody>
+          <a:bodyPr/>
+          <a:p/>
+        </p:txBody>
       </p:sp>
       <p:pic>
         <p:nvPicPr>
@@ -11870,6 +12006,10 @@
           </a:solidFill>
           <a:ln/>
         </p:spPr>
+        <p:txBody>
+          <a:bodyPr/>
+          <a:p/>
+        </p:txBody>
       </p:sp>
       <p:sp>
         <p:nvSpPr>
@@ -11892,6 +12032,10 @@
           </a:solidFill>
           <a:ln/>
         </p:spPr>
+        <p:txBody>
+          <a:bodyPr/>
+          <a:p/>
+        </p:txBody>
       </p:sp>
       <p:sp>
         <p:nvSpPr>
@@ -11912,6 +12056,10 @@
           </a:solidFill>
           <a:ln/>
         </p:spPr>
+        <p:txBody>
+          <a:bodyPr/>
+          <a:p/>
+        </p:txBody>
       </p:sp>
       <p:pic>
         <p:nvPicPr>
@@ -12028,6 +12176,10 @@
           </a:solidFill>
           <a:ln/>
         </p:spPr>
+        <p:txBody>
+          <a:bodyPr/>
+          <a:p/>
+        </p:txBody>
       </p:sp>
       <p:sp>
         <p:nvSpPr>
@@ -12050,6 +12202,10 @@
           </a:solidFill>
           <a:ln/>
         </p:spPr>
+        <p:txBody>
+          <a:bodyPr/>
+          <a:p/>
+        </p:txBody>
       </p:sp>
       <p:sp>
         <p:nvSpPr>
@@ -12070,6 +12226,10 @@
           </a:solidFill>
           <a:ln/>
         </p:spPr>
+        <p:txBody>
+          <a:bodyPr/>
+          <a:p/>
+        </p:txBody>
       </p:sp>
       <p:pic>
         <p:nvPicPr>
@@ -12188,6 +12348,10 @@
           </a:solidFill>
           <a:ln/>
         </p:spPr>
+        <p:txBody>
+          <a:bodyPr/>
+          <a:p/>
+        </p:txBody>
       </p:sp>
       <p:sp>
         <p:nvSpPr>
@@ -12949,6 +13113,10 @@
           </a:solidFill>
           <a:ln/>
         </p:spPr>
+        <p:txBody>
+          <a:bodyPr/>
+          <a:p/>
+        </p:txBody>
       </p:sp>
       <p:pic>
         <p:nvPicPr>
@@ -13068,6 +13236,10 @@
           </a:solidFill>
           <a:ln/>
         </p:spPr>
+        <p:txBody>
+          <a:bodyPr/>
+          <a:p/>
+        </p:txBody>
       </p:sp>
       <p:pic>
         <p:nvPicPr>
@@ -13187,6 +13359,10 @@
           </a:solidFill>
           <a:ln/>
         </p:spPr>
+        <p:txBody>
+          <a:bodyPr/>
+          <a:p/>
+        </p:txBody>
       </p:sp>
       <p:pic>
         <p:nvPicPr>
@@ -13306,6 +13482,10 @@
           </a:solidFill>
           <a:ln/>
         </p:spPr>
+        <p:txBody>
+          <a:bodyPr/>
+          <a:p/>
+        </p:txBody>
       </p:sp>
       <p:pic>
         <p:nvPicPr>
@@ -13590,6 +13770,10 @@
           </a:solidFill>
           <a:ln/>
         </p:spPr>
+        <p:txBody>
+          <a:bodyPr/>
+          <a:p/>
+        </p:txBody>
       </p:sp>
       <p:sp>
         <p:nvSpPr>
@@ -13698,6 +13882,10 @@
           </a:solidFill>
           <a:ln/>
         </p:spPr>
+        <p:txBody>
+          <a:bodyPr/>
+          <a:p/>
+        </p:txBody>
       </p:sp>
       <p:sp>
         <p:nvSpPr>
@@ -13806,6 +13994,10 @@
           </a:solidFill>
           <a:ln/>
         </p:spPr>
+        <p:txBody>
+          <a:bodyPr/>
+          <a:p/>
+        </p:txBody>
       </p:sp>
       <p:sp>
         <p:nvSpPr>
@@ -13916,6 +14108,10 @@
             <a:tailEnd type="triangle"/>
           </a:ln>
         </p:spPr>
+        <p:txBody>
+          <a:bodyPr/>
+          <a:p/>
+        </p:txBody>
       </p:sp>
       <p:sp>
         <p:nvSpPr>
@@ -14254,6 +14450,10 @@
           </a:solidFill>
           <a:ln/>
         </p:spPr>
+        <p:txBody>
+          <a:bodyPr/>
+          <a:p/>
+        </p:txBody>
       </p:sp>
       <p:sp>
         <p:nvSpPr>
@@ -14348,6 +14548,10 @@
           </a:solidFill>
           <a:ln/>
         </p:spPr>
+        <p:txBody>
+          <a:bodyPr/>
+          <a:p/>
+        </p:txBody>
       </p:sp>
       <p:sp>
         <p:nvSpPr>
@@ -14442,6 +14646,10 @@
           </a:solidFill>
           <a:ln/>
         </p:spPr>
+        <p:txBody>
+          <a:bodyPr/>
+          <a:p/>
+        </p:txBody>
       </p:sp>
       <p:sp>
         <p:nvSpPr>
@@ -14536,6 +14744,10 @@
           </a:solidFill>
           <a:ln/>
         </p:spPr>
+        <p:txBody>
+          <a:bodyPr/>
+          <a:p/>
+        </p:txBody>
       </p:sp>
       <p:sp>
         <p:nvSpPr>
@@ -14630,6 +14842,10 @@
           </a:solidFill>
           <a:ln/>
         </p:spPr>
+        <p:txBody>
+          <a:bodyPr/>
+          <a:p/>
+        </p:txBody>
       </p:sp>
       <p:sp>
         <p:nvSpPr>
@@ -14722,6 +14938,10 @@
           </a:solidFill>
           <a:ln/>
         </p:spPr>
+        <p:txBody>
+          <a:bodyPr/>
+          <a:p/>
+        </p:txBody>
       </p:sp>
       <p:pic>
         <p:nvPicPr>
@@ -14838,6 +15058,10 @@
           </a:solidFill>
           <a:ln/>
         </p:spPr>
+        <p:txBody>
+          <a:bodyPr/>
+          <a:p/>
+        </p:txBody>
       </p:sp>
       <p:pic>
         <p:nvPicPr>
@@ -14954,6 +15178,10 @@
           </a:solidFill>
           <a:ln/>
         </p:spPr>
+        <p:txBody>
+          <a:bodyPr/>
+          <a:p/>
+        </p:txBody>
       </p:sp>
       <p:pic>
         <p:nvPicPr>
@@ -15070,6 +15298,10 @@
           </a:solidFill>
           <a:ln/>
         </p:spPr>
+        <p:txBody>
+          <a:bodyPr/>
+          <a:p/>
+        </p:txBody>
       </p:sp>
       <p:pic>
         <p:nvPicPr>
@@ -18330,6 +18562,10 @@
           </a:solidFill>
           <a:ln/>
         </p:spPr>
+        <p:txBody>
+          <a:bodyPr/>
+          <a:p/>
+        </p:txBody>
       </p:sp>
       <p:sp>
         <p:nvSpPr>
